--- a/從早晨到夜晚.pptx
+++ b/從早晨到夜晚.pptx
@@ -5,10 +5,14 @@
     <p:sldMasterId id="2147483660" r:id="rId1"/>
   </p:sldMasterIdLst>
   <p:sldIdLst>
-    <p:sldId id="257" r:id="rId2"/>
-    <p:sldId id="258" r:id="rId3"/>
-    <p:sldId id="259" r:id="rId4"/>
-    <p:sldId id="260" r:id="rId5"/>
+    <p:sldId id="261" r:id="rId2"/>
+    <p:sldId id="262" r:id="rId3"/>
+    <p:sldId id="263" r:id="rId4"/>
+    <p:sldId id="264" r:id="rId5"/>
+    <p:sldId id="265" r:id="rId6"/>
+    <p:sldId id="266" r:id="rId7"/>
+    <p:sldId id="267" r:id="rId8"/>
+    <p:sldId id="268" r:id="rId9"/>
   </p:sldIdLst>
   <p:sldSz cx="12192000" cy="6858000"/>
   <p:notesSz cx="6858000" cy="9144000"/>
@@ -107,6 +111,11 @@
       </a:defRPr>
     </a:lvl9pPr>
   </p:defaultTextStyle>
+  <p:extLst>
+    <p:ext uri="{EFAFB233-063F-42B5-8137-9DF3F51BA10A}">
+      <p15:sldGuideLst xmlns:p15="http://schemas.microsoft.com/office/powerpoint/2012/main"/>
+    </p:ext>
+  </p:extLst>
 </p:presentation>
 </file>
 
@@ -148,7 +157,7 @@
           <a:lstStyle/>
           <a:p>
             <a:r>
-              <a:rPr lang="en-US" altLang="zh-TW" smtClean="0"/>
+              <a:rPr lang="en-US" altLang="zh-TW"/>
               <a:t>Click to edit Master title style</a:t>
             </a:r>
             <a:endParaRPr lang="zh-TW" altLang="en-US"/>
@@ -267,7 +276,7 @@
           </a:lstStyle>
           <a:p>
             <a:r>
-              <a:rPr lang="en-US" altLang="zh-TW" smtClean="0"/>
+              <a:rPr lang="en-US" altLang="zh-TW"/>
               <a:t>Click to edit Master subtitle style</a:t>
             </a:r>
             <a:endParaRPr lang="zh-TW" altLang="en-US"/>
@@ -291,7 +300,7 @@
           <a:p>
             <a:fld id="{AF817FA6-7280-4CA3-B35D-80B51CC2CB19}" type="datetimeFigureOut">
               <a:rPr lang="vi-VN" smtClean="0"/>
-              <a:t>13/06/2020</a:t>
+              <a:t>23/10/2025</a:t>
             </a:fld>
             <a:endParaRPr lang="vi-VN"/>
           </a:p>
@@ -385,7 +394,7 @@
           <a:lstStyle/>
           <a:p>
             <a:r>
-              <a:rPr lang="en-US" altLang="zh-TW" smtClean="0"/>
+              <a:rPr lang="en-US" altLang="zh-TW"/>
               <a:t>Click to edit Master title style</a:t>
             </a:r>
             <a:endParaRPr lang="zh-TW" altLang="en-US"/>
@@ -409,35 +418,35 @@
           <a:p>
             <a:pPr lvl="0"/>
             <a:r>
-              <a:rPr lang="en-US" altLang="zh-TW" smtClean="0"/>
+              <a:rPr lang="en-US" altLang="zh-TW"/>
               <a:t>Edit Master text styles</a:t>
             </a:r>
           </a:p>
           <a:p>
             <a:pPr lvl="1"/>
             <a:r>
-              <a:rPr lang="en-US" altLang="zh-TW" smtClean="0"/>
+              <a:rPr lang="en-US" altLang="zh-TW"/>
               <a:t>Second level</a:t>
             </a:r>
           </a:p>
           <a:p>
             <a:pPr lvl="2"/>
             <a:r>
-              <a:rPr lang="en-US" altLang="zh-TW" smtClean="0"/>
+              <a:rPr lang="en-US" altLang="zh-TW"/>
               <a:t>Third level</a:t>
             </a:r>
           </a:p>
           <a:p>
             <a:pPr lvl="3"/>
             <a:r>
-              <a:rPr lang="en-US" altLang="zh-TW" smtClean="0"/>
+              <a:rPr lang="en-US" altLang="zh-TW"/>
               <a:t>Fourth level</a:t>
             </a:r>
           </a:p>
           <a:p>
             <a:pPr lvl="4"/>
             <a:r>
-              <a:rPr lang="en-US" altLang="zh-TW" smtClean="0"/>
+              <a:rPr lang="en-US" altLang="zh-TW"/>
               <a:t>Fifth level</a:t>
             </a:r>
             <a:endParaRPr lang="zh-TW" altLang="en-US"/>
@@ -461,7 +470,7 @@
           <a:p>
             <a:fld id="{AF817FA6-7280-4CA3-B35D-80B51CC2CB19}" type="datetimeFigureOut">
               <a:rPr lang="vi-VN" smtClean="0"/>
-              <a:t>13/06/2020</a:t>
+              <a:t>23/10/2025</a:t>
             </a:fld>
             <a:endParaRPr lang="vi-VN"/>
           </a:p>
@@ -560,7 +569,7 @@
           <a:lstStyle/>
           <a:p>
             <a:r>
-              <a:rPr lang="en-US" altLang="zh-TW" smtClean="0"/>
+              <a:rPr lang="en-US" altLang="zh-TW"/>
               <a:t>Click to edit Master title style</a:t>
             </a:r>
             <a:endParaRPr lang="zh-TW" altLang="en-US"/>
@@ -589,35 +598,35 @@
           <a:p>
             <a:pPr lvl="0"/>
             <a:r>
-              <a:rPr lang="en-US" altLang="zh-TW" smtClean="0"/>
+              <a:rPr lang="en-US" altLang="zh-TW"/>
               <a:t>Edit Master text styles</a:t>
             </a:r>
           </a:p>
           <a:p>
             <a:pPr lvl="1"/>
             <a:r>
-              <a:rPr lang="en-US" altLang="zh-TW" smtClean="0"/>
+              <a:rPr lang="en-US" altLang="zh-TW"/>
               <a:t>Second level</a:t>
             </a:r>
           </a:p>
           <a:p>
             <a:pPr lvl="2"/>
             <a:r>
-              <a:rPr lang="en-US" altLang="zh-TW" smtClean="0"/>
+              <a:rPr lang="en-US" altLang="zh-TW"/>
               <a:t>Third level</a:t>
             </a:r>
           </a:p>
           <a:p>
             <a:pPr lvl="3"/>
             <a:r>
-              <a:rPr lang="en-US" altLang="zh-TW" smtClean="0"/>
+              <a:rPr lang="en-US" altLang="zh-TW"/>
               <a:t>Fourth level</a:t>
             </a:r>
           </a:p>
           <a:p>
             <a:pPr lvl="4"/>
             <a:r>
-              <a:rPr lang="en-US" altLang="zh-TW" smtClean="0"/>
+              <a:rPr lang="en-US" altLang="zh-TW"/>
               <a:t>Fifth level</a:t>
             </a:r>
             <a:endParaRPr lang="zh-TW" altLang="en-US"/>
@@ -641,7 +650,7 @@
           <a:p>
             <a:fld id="{AF817FA6-7280-4CA3-B35D-80B51CC2CB19}" type="datetimeFigureOut">
               <a:rPr lang="vi-VN" smtClean="0"/>
-              <a:t>13/06/2020</a:t>
+              <a:t>23/10/2025</a:t>
             </a:fld>
             <a:endParaRPr lang="vi-VN"/>
           </a:p>
@@ -735,7 +744,7 @@
           <a:lstStyle/>
           <a:p>
             <a:r>
-              <a:rPr lang="en-US" altLang="zh-TW" smtClean="0"/>
+              <a:rPr lang="en-US" altLang="zh-TW"/>
               <a:t>Click to edit Master title style</a:t>
             </a:r>
             <a:endParaRPr lang="zh-TW" altLang="en-US"/>
@@ -759,35 +768,35 @@
           <a:p>
             <a:pPr lvl="0"/>
             <a:r>
-              <a:rPr lang="en-US" altLang="zh-TW" smtClean="0"/>
+              <a:rPr lang="en-US" altLang="zh-TW"/>
               <a:t>Edit Master text styles</a:t>
             </a:r>
           </a:p>
           <a:p>
             <a:pPr lvl="1"/>
             <a:r>
-              <a:rPr lang="en-US" altLang="zh-TW" smtClean="0"/>
+              <a:rPr lang="en-US" altLang="zh-TW"/>
               <a:t>Second level</a:t>
             </a:r>
           </a:p>
           <a:p>
             <a:pPr lvl="2"/>
             <a:r>
-              <a:rPr lang="en-US" altLang="zh-TW" smtClean="0"/>
+              <a:rPr lang="en-US" altLang="zh-TW"/>
               <a:t>Third level</a:t>
             </a:r>
           </a:p>
           <a:p>
             <a:pPr lvl="3"/>
             <a:r>
-              <a:rPr lang="en-US" altLang="zh-TW" smtClean="0"/>
+              <a:rPr lang="en-US" altLang="zh-TW"/>
               <a:t>Fourth level</a:t>
             </a:r>
           </a:p>
           <a:p>
             <a:pPr lvl="4"/>
             <a:r>
-              <a:rPr lang="en-US" altLang="zh-TW" smtClean="0"/>
+              <a:rPr lang="en-US" altLang="zh-TW"/>
               <a:t>Fifth level</a:t>
             </a:r>
             <a:endParaRPr lang="zh-TW" altLang="en-US"/>
@@ -811,7 +820,7 @@
           <a:p>
             <a:fld id="{AF817FA6-7280-4CA3-B35D-80B51CC2CB19}" type="datetimeFigureOut">
               <a:rPr lang="vi-VN" smtClean="0"/>
-              <a:t>13/06/2020</a:t>
+              <a:t>23/10/2025</a:t>
             </a:fld>
             <a:endParaRPr lang="vi-VN"/>
           </a:p>
@@ -914,7 +923,7 @@
           </a:lstStyle>
           <a:p>
             <a:r>
-              <a:rPr lang="en-US" altLang="zh-TW" smtClean="0"/>
+              <a:rPr lang="en-US" altLang="zh-TW"/>
               <a:t>Click to edit Master title style</a:t>
             </a:r>
             <a:endParaRPr lang="zh-TW" altLang="en-US"/>
@@ -1034,7 +1043,7 @@
           <a:p>
             <a:pPr lvl="0"/>
             <a:r>
-              <a:rPr lang="en-US" altLang="zh-TW" smtClean="0"/>
+              <a:rPr lang="en-US" altLang="zh-TW"/>
               <a:t>Edit Master text styles</a:t>
             </a:r>
           </a:p>
@@ -1057,7 +1066,7 @@
           <a:p>
             <a:fld id="{AF817FA6-7280-4CA3-B35D-80B51CC2CB19}" type="datetimeFigureOut">
               <a:rPr lang="vi-VN" smtClean="0"/>
-              <a:t>13/06/2020</a:t>
+              <a:t>23/10/2025</a:t>
             </a:fld>
             <a:endParaRPr lang="vi-VN"/>
           </a:p>
@@ -1151,7 +1160,7 @@
           <a:lstStyle/>
           <a:p>
             <a:r>
-              <a:rPr lang="en-US" altLang="zh-TW" smtClean="0"/>
+              <a:rPr lang="en-US" altLang="zh-TW"/>
               <a:t>Click to edit Master title style</a:t>
             </a:r>
             <a:endParaRPr lang="zh-TW" altLang="en-US"/>
@@ -1208,35 +1217,35 @@
           <a:p>
             <a:pPr lvl="0"/>
             <a:r>
-              <a:rPr lang="en-US" altLang="zh-TW" smtClean="0"/>
+              <a:rPr lang="en-US" altLang="zh-TW"/>
               <a:t>Edit Master text styles</a:t>
             </a:r>
           </a:p>
           <a:p>
             <a:pPr lvl="1"/>
             <a:r>
-              <a:rPr lang="en-US" altLang="zh-TW" smtClean="0"/>
+              <a:rPr lang="en-US" altLang="zh-TW"/>
               <a:t>Second level</a:t>
             </a:r>
           </a:p>
           <a:p>
             <a:pPr lvl="2"/>
             <a:r>
-              <a:rPr lang="en-US" altLang="zh-TW" smtClean="0"/>
+              <a:rPr lang="en-US" altLang="zh-TW"/>
               <a:t>Third level</a:t>
             </a:r>
           </a:p>
           <a:p>
             <a:pPr lvl="3"/>
             <a:r>
-              <a:rPr lang="en-US" altLang="zh-TW" smtClean="0"/>
+              <a:rPr lang="en-US" altLang="zh-TW"/>
               <a:t>Fourth level</a:t>
             </a:r>
           </a:p>
           <a:p>
             <a:pPr lvl="4"/>
             <a:r>
-              <a:rPr lang="en-US" altLang="zh-TW" smtClean="0"/>
+              <a:rPr lang="en-US" altLang="zh-TW"/>
               <a:t>Fifth level</a:t>
             </a:r>
             <a:endParaRPr lang="zh-TW" altLang="en-US"/>
@@ -1293,35 +1302,35 @@
           <a:p>
             <a:pPr lvl="0"/>
             <a:r>
-              <a:rPr lang="en-US" altLang="zh-TW" smtClean="0"/>
+              <a:rPr lang="en-US" altLang="zh-TW"/>
               <a:t>Edit Master text styles</a:t>
             </a:r>
           </a:p>
           <a:p>
             <a:pPr lvl="1"/>
             <a:r>
-              <a:rPr lang="en-US" altLang="zh-TW" smtClean="0"/>
+              <a:rPr lang="en-US" altLang="zh-TW"/>
               <a:t>Second level</a:t>
             </a:r>
           </a:p>
           <a:p>
             <a:pPr lvl="2"/>
             <a:r>
-              <a:rPr lang="en-US" altLang="zh-TW" smtClean="0"/>
+              <a:rPr lang="en-US" altLang="zh-TW"/>
               <a:t>Third level</a:t>
             </a:r>
           </a:p>
           <a:p>
             <a:pPr lvl="3"/>
             <a:r>
-              <a:rPr lang="en-US" altLang="zh-TW" smtClean="0"/>
+              <a:rPr lang="en-US" altLang="zh-TW"/>
               <a:t>Fourth level</a:t>
             </a:r>
           </a:p>
           <a:p>
             <a:pPr lvl="4"/>
             <a:r>
-              <a:rPr lang="en-US" altLang="zh-TW" smtClean="0"/>
+              <a:rPr lang="en-US" altLang="zh-TW"/>
               <a:t>Fifth level</a:t>
             </a:r>
             <a:endParaRPr lang="zh-TW" altLang="en-US"/>
@@ -1345,7 +1354,7 @@
           <a:p>
             <a:fld id="{AF817FA6-7280-4CA3-B35D-80B51CC2CB19}" type="datetimeFigureOut">
               <a:rPr lang="vi-VN" smtClean="0"/>
-              <a:t>13/06/2020</a:t>
+              <a:t>23/10/2025</a:t>
             </a:fld>
             <a:endParaRPr lang="vi-VN"/>
           </a:p>
@@ -1443,7 +1452,7 @@
           </a:lstStyle>
           <a:p>
             <a:r>
-              <a:rPr lang="en-US" altLang="zh-TW" smtClean="0"/>
+              <a:rPr lang="en-US" altLang="zh-TW"/>
               <a:t>Click to edit Master title style</a:t>
             </a:r>
             <a:endParaRPr lang="zh-TW" altLang="en-US"/>
@@ -1509,7 +1518,7 @@
           <a:p>
             <a:pPr lvl="0"/>
             <a:r>
-              <a:rPr lang="en-US" altLang="zh-TW" smtClean="0"/>
+              <a:rPr lang="en-US" altLang="zh-TW"/>
               <a:t>Edit Master text styles</a:t>
             </a:r>
           </a:p>
@@ -1565,35 +1574,35 @@
           <a:p>
             <a:pPr lvl="0"/>
             <a:r>
-              <a:rPr lang="en-US" altLang="zh-TW" smtClean="0"/>
+              <a:rPr lang="en-US" altLang="zh-TW"/>
               <a:t>Edit Master text styles</a:t>
             </a:r>
           </a:p>
           <a:p>
             <a:pPr lvl="1"/>
             <a:r>
-              <a:rPr lang="en-US" altLang="zh-TW" smtClean="0"/>
+              <a:rPr lang="en-US" altLang="zh-TW"/>
               <a:t>Second level</a:t>
             </a:r>
           </a:p>
           <a:p>
             <a:pPr lvl="2"/>
             <a:r>
-              <a:rPr lang="en-US" altLang="zh-TW" smtClean="0"/>
+              <a:rPr lang="en-US" altLang="zh-TW"/>
               <a:t>Third level</a:t>
             </a:r>
           </a:p>
           <a:p>
             <a:pPr lvl="3"/>
             <a:r>
-              <a:rPr lang="en-US" altLang="zh-TW" smtClean="0"/>
+              <a:rPr lang="en-US" altLang="zh-TW"/>
               <a:t>Fourth level</a:t>
             </a:r>
           </a:p>
           <a:p>
             <a:pPr lvl="4"/>
             <a:r>
-              <a:rPr lang="en-US" altLang="zh-TW" smtClean="0"/>
+              <a:rPr lang="en-US" altLang="zh-TW"/>
               <a:t>Fifth level</a:t>
             </a:r>
             <a:endParaRPr lang="zh-TW" altLang="en-US"/>
@@ -1659,7 +1668,7 @@
           <a:p>
             <a:pPr lvl="0"/>
             <a:r>
-              <a:rPr lang="en-US" altLang="zh-TW" smtClean="0"/>
+              <a:rPr lang="en-US" altLang="zh-TW"/>
               <a:t>Edit Master text styles</a:t>
             </a:r>
           </a:p>
@@ -1715,35 +1724,35 @@
           <a:p>
             <a:pPr lvl="0"/>
             <a:r>
-              <a:rPr lang="en-US" altLang="zh-TW" smtClean="0"/>
+              <a:rPr lang="en-US" altLang="zh-TW"/>
               <a:t>Edit Master text styles</a:t>
             </a:r>
           </a:p>
           <a:p>
             <a:pPr lvl="1"/>
             <a:r>
-              <a:rPr lang="en-US" altLang="zh-TW" smtClean="0"/>
+              <a:rPr lang="en-US" altLang="zh-TW"/>
               <a:t>Second level</a:t>
             </a:r>
           </a:p>
           <a:p>
             <a:pPr lvl="2"/>
             <a:r>
-              <a:rPr lang="en-US" altLang="zh-TW" smtClean="0"/>
+              <a:rPr lang="en-US" altLang="zh-TW"/>
               <a:t>Third level</a:t>
             </a:r>
           </a:p>
           <a:p>
             <a:pPr lvl="3"/>
             <a:r>
-              <a:rPr lang="en-US" altLang="zh-TW" smtClean="0"/>
+              <a:rPr lang="en-US" altLang="zh-TW"/>
               <a:t>Fourth level</a:t>
             </a:r>
           </a:p>
           <a:p>
             <a:pPr lvl="4"/>
             <a:r>
-              <a:rPr lang="en-US" altLang="zh-TW" smtClean="0"/>
+              <a:rPr lang="en-US" altLang="zh-TW"/>
               <a:t>Fifth level</a:t>
             </a:r>
             <a:endParaRPr lang="zh-TW" altLang="en-US"/>
@@ -1767,7 +1776,7 @@
           <a:p>
             <a:fld id="{AF817FA6-7280-4CA3-B35D-80B51CC2CB19}" type="datetimeFigureOut">
               <a:rPr lang="vi-VN" smtClean="0"/>
-              <a:t>13/06/2020</a:t>
+              <a:t>23/10/2025</a:t>
             </a:fld>
             <a:endParaRPr lang="vi-VN"/>
           </a:p>
@@ -1861,7 +1870,7 @@
           <a:lstStyle/>
           <a:p>
             <a:r>
-              <a:rPr lang="en-US" altLang="zh-TW" smtClean="0"/>
+              <a:rPr lang="en-US" altLang="zh-TW"/>
               <a:t>Click to edit Master title style</a:t>
             </a:r>
             <a:endParaRPr lang="zh-TW" altLang="en-US"/>
@@ -1885,7 +1894,7 @@
           <a:p>
             <a:fld id="{AF817FA6-7280-4CA3-B35D-80B51CC2CB19}" type="datetimeFigureOut">
               <a:rPr lang="vi-VN" smtClean="0"/>
-              <a:t>13/06/2020</a:t>
+              <a:t>23/10/2025</a:t>
             </a:fld>
             <a:endParaRPr lang="vi-VN"/>
           </a:p>
@@ -1980,7 +1989,7 @@
           <a:p>
             <a:fld id="{AF817FA6-7280-4CA3-B35D-80B51CC2CB19}" type="datetimeFigureOut">
               <a:rPr lang="vi-VN" smtClean="0"/>
-              <a:t>13/06/2020</a:t>
+              <a:t>23/10/2025</a:t>
             </a:fld>
             <a:endParaRPr lang="vi-VN"/>
           </a:p>
@@ -2083,7 +2092,7 @@
           </a:lstStyle>
           <a:p>
             <a:r>
-              <a:rPr lang="en-US" altLang="zh-TW" smtClean="0"/>
+              <a:rPr lang="en-US" altLang="zh-TW"/>
               <a:t>Click to edit Master title style</a:t>
             </a:r>
             <a:endParaRPr lang="zh-TW" altLang="en-US"/>
@@ -2140,35 +2149,35 @@
           <a:p>
             <a:pPr lvl="0"/>
             <a:r>
-              <a:rPr lang="en-US" altLang="zh-TW" smtClean="0"/>
+              <a:rPr lang="en-US" altLang="zh-TW"/>
               <a:t>Edit Master text styles</a:t>
             </a:r>
           </a:p>
           <a:p>
             <a:pPr lvl="1"/>
             <a:r>
-              <a:rPr lang="en-US" altLang="zh-TW" smtClean="0"/>
+              <a:rPr lang="en-US" altLang="zh-TW"/>
               <a:t>Second level</a:t>
             </a:r>
           </a:p>
           <a:p>
             <a:pPr lvl="2"/>
             <a:r>
-              <a:rPr lang="en-US" altLang="zh-TW" smtClean="0"/>
+              <a:rPr lang="en-US" altLang="zh-TW"/>
               <a:t>Third level</a:t>
             </a:r>
           </a:p>
           <a:p>
             <a:pPr lvl="3"/>
             <a:r>
-              <a:rPr lang="en-US" altLang="zh-TW" smtClean="0"/>
+              <a:rPr lang="en-US" altLang="zh-TW"/>
               <a:t>Fourth level</a:t>
             </a:r>
           </a:p>
           <a:p>
             <a:pPr lvl="4"/>
             <a:r>
-              <a:rPr lang="en-US" altLang="zh-TW" smtClean="0"/>
+              <a:rPr lang="en-US" altLang="zh-TW"/>
               <a:t>Fifth level</a:t>
             </a:r>
             <a:endParaRPr lang="zh-TW" altLang="en-US"/>
@@ -2234,7 +2243,7 @@
           <a:p>
             <a:pPr lvl="0"/>
             <a:r>
-              <a:rPr lang="en-US" altLang="zh-TW" smtClean="0"/>
+              <a:rPr lang="en-US" altLang="zh-TW"/>
               <a:t>Edit Master text styles</a:t>
             </a:r>
           </a:p>
@@ -2257,7 +2266,7 @@
           <a:p>
             <a:fld id="{AF817FA6-7280-4CA3-B35D-80B51CC2CB19}" type="datetimeFigureOut">
               <a:rPr lang="vi-VN" smtClean="0"/>
-              <a:t>13/06/2020</a:t>
+              <a:t>23/10/2025</a:t>
             </a:fld>
             <a:endParaRPr lang="vi-VN"/>
           </a:p>
@@ -2360,7 +2369,7 @@
           </a:lstStyle>
           <a:p>
             <a:r>
-              <a:rPr lang="en-US" altLang="zh-TW" smtClean="0"/>
+              <a:rPr lang="en-US" altLang="zh-TW"/>
               <a:t>Click to edit Master title style</a:t>
             </a:r>
             <a:endParaRPr lang="zh-TW" altLang="en-US"/>
@@ -2425,7 +2434,7 @@
           </a:lstStyle>
           <a:p>
             <a:r>
-              <a:rPr lang="en-US" altLang="zh-TW" smtClean="0"/>
+              <a:rPr lang="en-US" altLang="zh-TW"/>
               <a:t>Click icon to add picture</a:t>
             </a:r>
             <a:endParaRPr lang="zh-TW" altLang="en-US"/>
@@ -2491,7 +2500,7 @@
           <a:p>
             <a:pPr lvl="0"/>
             <a:r>
-              <a:rPr lang="en-US" altLang="zh-TW" smtClean="0"/>
+              <a:rPr lang="en-US" altLang="zh-TW"/>
               <a:t>Edit Master text styles</a:t>
             </a:r>
           </a:p>
@@ -2514,7 +2523,7 @@
           <a:p>
             <a:fld id="{AF817FA6-7280-4CA3-B35D-80B51CC2CB19}" type="datetimeFigureOut">
               <a:rPr lang="vi-VN" smtClean="0"/>
-              <a:t>13/06/2020</a:t>
+              <a:t>23/10/2025</a:t>
             </a:fld>
             <a:endParaRPr lang="vi-VN"/>
           </a:p>
@@ -2628,10 +2637,9 @@
           <a:lstStyle/>
           <a:p>
             <a:r>
-              <a:rPr lang="zh-TW" altLang="en-US" smtClean="0"/>
+              <a:rPr lang="zh-TW" altLang="en-US"/>
               <a:t>按一下以編輯母片標題樣式</a:t>
             </a:r>
-            <a:endParaRPr lang="zh-TW" altLang="en-US"/>
           </a:p>
         </p:txBody>
       </p:sp>
@@ -2662,38 +2670,37 @@
           <a:p>
             <a:pPr lvl="0"/>
             <a:r>
-              <a:rPr lang="zh-TW" altLang="en-US" smtClean="0"/>
+              <a:rPr lang="zh-TW" altLang="en-US"/>
               <a:t>按一下以編輯母片文字樣式</a:t>
             </a:r>
           </a:p>
           <a:p>
             <a:pPr lvl="1"/>
             <a:r>
-              <a:rPr lang="zh-TW" altLang="en-US" smtClean="0"/>
+              <a:rPr lang="zh-TW" altLang="en-US"/>
               <a:t>第二層</a:t>
             </a:r>
           </a:p>
           <a:p>
             <a:pPr lvl="2"/>
             <a:r>
-              <a:rPr lang="zh-TW" altLang="en-US" smtClean="0"/>
+              <a:rPr lang="zh-TW" altLang="en-US"/>
               <a:t>第三層</a:t>
             </a:r>
           </a:p>
           <a:p>
             <a:pPr lvl="3"/>
             <a:r>
-              <a:rPr lang="zh-TW" altLang="en-US" smtClean="0"/>
+              <a:rPr lang="zh-TW" altLang="en-US"/>
               <a:t>第四層</a:t>
             </a:r>
           </a:p>
           <a:p>
             <a:pPr lvl="4"/>
             <a:r>
-              <a:rPr lang="zh-TW" altLang="en-US" smtClean="0"/>
+              <a:rPr lang="zh-TW" altLang="en-US"/>
               <a:t>第五層</a:t>
             </a:r>
-            <a:endParaRPr lang="zh-TW" altLang="en-US"/>
           </a:p>
         </p:txBody>
       </p:sp>
@@ -2732,7 +2739,7 @@
           <a:p>
             <a:fld id="{AF817FA6-7280-4CA3-B35D-80B51CC2CB19}" type="datetimeFigureOut">
               <a:rPr lang="vi-VN" smtClean="0"/>
-              <a:t>13/06/2020</a:t>
+              <a:t>23/10/2025</a:t>
             </a:fld>
             <a:endParaRPr lang="vi-VN"/>
           </a:p>
@@ -3109,7 +3116,7 @@
       </p:grpSpPr>
       <p:sp>
         <p:nvSpPr>
-          <p:cNvPr id="2" name="Title 1"/>
+          <p:cNvPr id="4" name="標題 3"/>
           <p:cNvSpPr>
             <a:spLocks noGrp="1"/>
           </p:cNvSpPr>
@@ -3117,136 +3124,42 @@
             <p:ph type="title"/>
           </p:nvPr>
         </p:nvSpPr>
-        <p:spPr/>
+        <p:spPr>
+          <a:xfrm>
+            <a:off x="0" y="2660915"/>
+            <a:ext cx="12192000" cy="1143000"/>
+          </a:xfrm>
+        </p:spPr>
         <p:txBody>
           <a:bodyPr>
-            <a:normAutofit/>
+            <a:noAutofit/>
           </a:bodyPr>
           <a:lstStyle/>
           <a:p>
             <a:r>
-              <a:rPr lang="zh-TW" altLang="en-US" sz="4800" b="1" dirty="0">
-                <a:latin typeface="Microsoft JhengHei" panose="020B0604030504040204" pitchFamily="34" charset="-120"/>
-                <a:ea typeface="Microsoft JhengHei" panose="020B0604030504040204" pitchFamily="34" charset="-120"/>
+              <a:rPr lang="zh-TW" altLang="en-US" sz="7200" b="1" i="1" dirty="0">
+                <a:solidFill>
+                  <a:srgbClr val="660033"/>
+                </a:solidFill>
+                <a:effectLst>
+                  <a:outerShdw blurRad="38100" dist="38100" dir="2700000" algn="tl">
+                    <a:srgbClr val="000000">
+                      <a:alpha val="43137"/>
+                    </a:srgbClr>
+                  </a:outerShdw>
+                </a:effectLst>
+                <a:latin typeface="微軟正黑體" pitchFamily="34" charset="-120"/>
+                <a:ea typeface="微軟正黑體" pitchFamily="34" charset="-120"/>
               </a:rPr>
-              <a:t>從早晨到夜</a:t>
-            </a:r>
-            <a:r>
-              <a:rPr lang="zh-TW" altLang="en-US" sz="4800" b="1" dirty="0" smtClean="0">
-                <a:latin typeface="Microsoft JhengHei" panose="020B0604030504040204" pitchFamily="34" charset="-120"/>
-                <a:ea typeface="Microsoft JhengHei" panose="020B0604030504040204" pitchFamily="34" charset="-120"/>
-              </a:rPr>
-              <a:t>晚</a:t>
-            </a:r>
-            <a:endParaRPr lang="vi-VN" sz="4800" b="1" dirty="0">
-              <a:ea typeface="Microsoft JhengHei" panose="020B0604030504040204" pitchFamily="34" charset="-120"/>
-            </a:endParaRPr>
-          </a:p>
-        </p:txBody>
-      </p:sp>
-      <p:sp>
-        <p:nvSpPr>
-          <p:cNvPr id="3" name="Content Placeholder 2"/>
-          <p:cNvSpPr>
-            <a:spLocks noGrp="1"/>
-          </p:cNvSpPr>
-          <p:nvPr>
-            <p:ph idx="1"/>
-          </p:nvPr>
-        </p:nvSpPr>
-        <p:spPr/>
-        <p:txBody>
-          <a:bodyPr>
-            <a:normAutofit/>
-          </a:bodyPr>
-          <a:lstStyle/>
-          <a:p>
-            <a:pPr marL="0" indent="0" algn="ctr">
-              <a:buNone/>
-            </a:pPr>
-            <a:r>
-              <a:rPr lang="zh-TW" altLang="en-US" sz="5400" b="1" dirty="0">
-                <a:latin typeface="Microsoft JhengHei" panose="020B0604030504040204" pitchFamily="34" charset="-120"/>
-                <a:ea typeface="Microsoft JhengHei" panose="020B0604030504040204" pitchFamily="34" charset="-120"/>
-              </a:rPr>
-              <a:t>早晨我睜開眼睛 </a:t>
-            </a:r>
-            <a:endParaRPr lang="vi-VN" altLang="zh-TW" sz="5400" b="1" dirty="0" smtClean="0">
-              <a:ea typeface="Microsoft JhengHei" panose="020B0604030504040204" pitchFamily="34" charset="-120"/>
-            </a:endParaRPr>
-          </a:p>
-          <a:p>
-            <a:pPr marL="0" indent="0" algn="ctr">
-              <a:buNone/>
-            </a:pPr>
-            <a:r>
-              <a:rPr lang="zh-TW" altLang="en-US" sz="5400" b="1" dirty="0" smtClean="0">
-                <a:latin typeface="Microsoft JhengHei" panose="020B0604030504040204" pitchFamily="34" charset="-120"/>
-                <a:ea typeface="Microsoft JhengHei" panose="020B0604030504040204" pitchFamily="34" charset="-120"/>
-              </a:rPr>
-              <a:t>渴</a:t>
-            </a:r>
-            <a:r>
-              <a:rPr lang="zh-TW" altLang="en-US" sz="5400" b="1" dirty="0">
-                <a:latin typeface="Microsoft JhengHei" panose="020B0604030504040204" pitchFamily="34" charset="-120"/>
-                <a:ea typeface="Microsoft JhengHei" panose="020B0604030504040204" pitchFamily="34" charset="-120"/>
-              </a:rPr>
-              <a:t>望聆聽祢聲音 </a:t>
-            </a:r>
-            <a:endParaRPr lang="vi-VN" altLang="zh-TW" sz="5400" b="1" dirty="0" smtClean="0">
-              <a:ea typeface="Microsoft JhengHei" panose="020B0604030504040204" pitchFamily="34" charset="-120"/>
-            </a:endParaRPr>
-          </a:p>
-          <a:p>
-            <a:pPr marL="0" indent="0" algn="ctr">
-              <a:buNone/>
-            </a:pPr>
-            <a:r>
-              <a:rPr lang="zh-TW" altLang="en-US" sz="5400" b="1" dirty="0" smtClean="0">
-                <a:latin typeface="Microsoft JhengHei" panose="020B0604030504040204" pitchFamily="34" charset="-120"/>
-                <a:ea typeface="Microsoft JhengHei" panose="020B0604030504040204" pitchFamily="34" charset="-120"/>
-              </a:rPr>
-              <a:t>心</a:t>
-            </a:r>
-            <a:r>
-              <a:rPr lang="zh-TW" altLang="en-US" sz="5400" b="1" dirty="0">
-                <a:latin typeface="Microsoft JhengHei" panose="020B0604030504040204" pitchFamily="34" charset="-120"/>
-                <a:ea typeface="Microsoft JhengHei" panose="020B0604030504040204" pitchFamily="34" charset="-120"/>
-              </a:rPr>
-              <a:t>中思想祢的好 </a:t>
-            </a:r>
-            <a:endParaRPr lang="vi-VN" altLang="zh-TW" sz="5400" b="1" dirty="0" smtClean="0">
-              <a:ea typeface="Microsoft JhengHei" panose="020B0604030504040204" pitchFamily="34" charset="-120"/>
-            </a:endParaRPr>
-          </a:p>
-          <a:p>
-            <a:pPr marL="0" indent="0" algn="ctr">
-              <a:buNone/>
-            </a:pPr>
-            <a:r>
-              <a:rPr lang="zh-TW" altLang="en-US" sz="5400" b="1" dirty="0" smtClean="0">
-                <a:latin typeface="Microsoft JhengHei" panose="020B0604030504040204" pitchFamily="34" charset="-120"/>
-                <a:ea typeface="Microsoft JhengHei" panose="020B0604030504040204" pitchFamily="34" charset="-120"/>
-              </a:rPr>
-              <a:t>更</a:t>
-            </a:r>
-            <a:r>
-              <a:rPr lang="zh-TW" altLang="en-US" sz="5400" b="1" dirty="0">
-                <a:latin typeface="Microsoft JhengHei" panose="020B0604030504040204" pitchFamily="34" charset="-120"/>
-                <a:ea typeface="Microsoft JhengHei" panose="020B0604030504040204" pitchFamily="34" charset="-120"/>
-              </a:rPr>
-              <a:t>多與祢來親近</a:t>
-            </a:r>
-            <a:endParaRPr lang="vi-VN" sz="5400" b="1" dirty="0">
-              <a:ea typeface="Microsoft JhengHei" panose="020B0604030504040204" pitchFamily="34" charset="-120"/>
-            </a:endParaRPr>
+              <a:t>從早晨到夜晚</a:t>
+            </a:r>
           </a:p>
         </p:txBody>
       </p:sp>
     </p:spTree>
     <p:extLst>
       <p:ext uri="{BB962C8B-B14F-4D97-AF65-F5344CB8AC3E}">
-        <p14:creationId xmlns:p14="http://schemas.microsoft.com/office/powerpoint/2010/main" val="3454748389"/>
+        <p14:creationId xmlns:p14="http://schemas.microsoft.com/office/powerpoint/2010/main" val="3537568509"/>
       </p:ext>
     </p:extLst>
   </p:cSld>
@@ -3275,139 +3188,114 @@
       </p:grpSpPr>
       <p:sp>
         <p:nvSpPr>
-          <p:cNvPr id="2" name="Title 1"/>
-          <p:cNvSpPr>
-            <a:spLocks noGrp="1"/>
-          </p:cNvSpPr>
-          <p:nvPr>
-            <p:ph type="title"/>
-          </p:nvPr>
-        </p:nvSpPr>
-        <p:spPr/>
-        <p:txBody>
-          <a:bodyPr>
+          <p:cNvPr id="5" name="內容版面配置區 4"/>
+          <p:cNvSpPr>
+            <a:spLocks noGrp="1"/>
+          </p:cNvSpPr>
+          <p:nvPr>
+            <p:ph idx="1"/>
+          </p:nvPr>
+        </p:nvSpPr>
+        <p:spPr>
+          <a:xfrm>
+            <a:off x="0" y="2084851"/>
+            <a:ext cx="12192000" cy="2404863"/>
+          </a:xfrm>
+        </p:spPr>
+        <p:txBody>
+          <a:bodyPr anchor="ctr">
             <a:normAutofit/>
           </a:bodyPr>
           <a:lstStyle/>
           <a:p>
-            <a:r>
-              <a:rPr lang="zh-TW" altLang="en-US" sz="4800" b="1" dirty="0">
+            <a:pPr marL="0" indent="0" algn="ctr">
+              <a:buNone/>
+            </a:pPr>
+            <a:r>
+              <a:rPr lang="zh-TW" altLang="en-US" sz="6400" b="1" dirty="0">
+                <a:solidFill>
+                  <a:srgbClr val="660033"/>
+                </a:solidFill>
+                <a:latin typeface="微軟正黑體" pitchFamily="34" charset="-120"/>
+                <a:ea typeface="微軟正黑體" pitchFamily="34" charset="-120"/>
+              </a:rPr>
+              <a:t>早晨我睜開眼睛 </a:t>
+            </a:r>
+          </a:p>
+          <a:p>
+            <a:pPr marL="0" indent="0" algn="ctr">
+              <a:buNone/>
+            </a:pPr>
+            <a:r>
+              <a:rPr lang="zh-TW" altLang="en-US" sz="6400" b="1" dirty="0">
+                <a:solidFill>
+                  <a:srgbClr val="660033"/>
+                </a:solidFill>
+                <a:latin typeface="微軟正黑體" pitchFamily="34" charset="-120"/>
+                <a:ea typeface="微軟正黑體" pitchFamily="34" charset="-120"/>
+              </a:rPr>
+              <a:t>渴望聆聽祢聲音 </a:t>
+            </a:r>
+          </a:p>
+        </p:txBody>
+      </p:sp>
+      <p:sp>
+        <p:nvSpPr>
+          <p:cNvPr id="3" name="TextBox 2"/>
+          <p:cNvSpPr txBox="1"/>
+          <p:nvPr/>
+        </p:nvSpPr>
+        <p:spPr>
+          <a:xfrm>
+            <a:off x="0" y="5157192"/>
+            <a:ext cx="12192000" cy="666786"/>
+          </a:xfrm>
+          <a:prstGeom prst="rect">
+            <a:avLst/>
+          </a:prstGeom>
+          <a:noFill/>
+        </p:spPr>
+        <p:txBody>
+          <a:bodyPr wrap="square" rtlCol="0">
+            <a:spAutoFit/>
+          </a:bodyPr>
+          <a:lstStyle/>
+          <a:p>
+            <a:pPr algn="ctr"/>
+            <a:r>
+              <a:rPr lang="en-US" sz="3733" b="1" dirty="0">
+                <a:solidFill>
+                  <a:srgbClr val="660033"/>
+                </a:solidFill>
                 <a:latin typeface="Microsoft JhengHei" panose="020B0604030504040204" pitchFamily="34" charset="-120"/>
                 <a:ea typeface="Microsoft JhengHei" panose="020B0604030504040204" pitchFamily="34" charset="-120"/>
               </a:rPr>
-              <a:t>從早晨到夜</a:t>
-            </a:r>
-            <a:r>
-              <a:rPr lang="zh-TW" altLang="en-US" sz="4800" b="1" dirty="0" smtClean="0">
+              <a:t>( </a:t>
+            </a:r>
+            <a:r>
+              <a:rPr lang="zh-CN" altLang="en-US" sz="3733" b="1" dirty="0">
+                <a:solidFill>
+                  <a:srgbClr val="660033"/>
+                </a:solidFill>
                 <a:latin typeface="Microsoft JhengHei" panose="020B0604030504040204" pitchFamily="34" charset="-120"/>
                 <a:ea typeface="Microsoft JhengHei" panose="020B0604030504040204" pitchFamily="34" charset="-120"/>
               </a:rPr>
-              <a:t>晚</a:t>
-            </a:r>
-            <a:endParaRPr lang="vi-VN" sz="4800" b="1" dirty="0">
-              <a:ea typeface="Microsoft JhengHei" panose="020B0604030504040204" pitchFamily="34" charset="-120"/>
-            </a:endParaRPr>
-          </a:p>
-        </p:txBody>
-      </p:sp>
-      <p:sp>
-        <p:nvSpPr>
-          <p:cNvPr id="3" name="Content Placeholder 2"/>
-          <p:cNvSpPr>
-            <a:spLocks noGrp="1"/>
-          </p:cNvSpPr>
-          <p:nvPr>
-            <p:ph idx="1"/>
-          </p:nvPr>
-        </p:nvSpPr>
-        <p:spPr/>
-        <p:txBody>
-          <a:bodyPr>
-            <a:normAutofit/>
-          </a:bodyPr>
-          <a:lstStyle/>
-          <a:p>
-            <a:pPr marL="0" indent="0" algn="ctr">
-              <a:buNone/>
-            </a:pPr>
-            <a:r>
-              <a:rPr lang="zh-TW" altLang="en-US" sz="5400" b="1" dirty="0">
+              <a:t>正歌</a:t>
+            </a:r>
+            <a:r>
+              <a:rPr lang="en-US" sz="3733" b="1" dirty="0">
+                <a:solidFill>
+                  <a:srgbClr val="660033"/>
+                </a:solidFill>
                 <a:latin typeface="Microsoft JhengHei" panose="020B0604030504040204" pitchFamily="34" charset="-120"/>
                 <a:ea typeface="Microsoft JhengHei" panose="020B0604030504040204" pitchFamily="34" charset="-120"/>
               </a:rPr>
-              <a:t>夜晚我仍要歌唱 </a:t>
-            </a:r>
-            <a:endParaRPr lang="vi-VN" altLang="zh-TW" sz="5400" b="1" dirty="0">
-              <a:latin typeface="Microsoft JhengHei" panose="020B0604030504040204" pitchFamily="34" charset="-120"/>
-              <a:ea typeface="Microsoft JhengHei" panose="020B0604030504040204" pitchFamily="34" charset="-120"/>
-            </a:endParaRPr>
-          </a:p>
-          <a:p>
-            <a:pPr marL="0" indent="0" algn="ctr">
-              <a:buNone/>
-            </a:pPr>
-            <a:r>
-              <a:rPr lang="zh-TW" altLang="en-US" sz="5400" b="1" dirty="0">
-                <a:latin typeface="Microsoft JhengHei" panose="020B0604030504040204" pitchFamily="34" charset="-120"/>
-                <a:ea typeface="Microsoft JhengHei" panose="020B0604030504040204" pitchFamily="34" charset="-120"/>
-              </a:rPr>
-              <a:t>向</a:t>
-            </a:r>
-            <a:r>
-              <a:rPr lang="zh-TW" altLang="en-US" sz="5400" b="1" dirty="0">
-                <a:latin typeface="Microsoft JhengHei" panose="020B0604030504040204" pitchFamily="34" charset="-120"/>
-                <a:ea typeface="Microsoft JhengHei" panose="020B0604030504040204" pitchFamily="34" charset="-120"/>
-              </a:rPr>
-              <a:t>祢闡明我心意 </a:t>
-            </a:r>
-            <a:endParaRPr lang="vi-VN" altLang="zh-TW" sz="5400" b="1" dirty="0">
-              <a:latin typeface="Microsoft JhengHei" panose="020B0604030504040204" pitchFamily="34" charset="-120"/>
-              <a:ea typeface="Microsoft JhengHei" panose="020B0604030504040204" pitchFamily="34" charset="-120"/>
-            </a:endParaRPr>
-          </a:p>
-          <a:p>
-            <a:pPr marL="0" indent="0" algn="ctr">
-              <a:buNone/>
-            </a:pPr>
-            <a:r>
-              <a:rPr lang="zh-TW" altLang="en-US" sz="5400" b="1" dirty="0">
-                <a:latin typeface="Microsoft JhengHei" panose="020B0604030504040204" pitchFamily="34" charset="-120"/>
-                <a:ea typeface="Microsoft JhengHei" panose="020B0604030504040204" pitchFamily="34" charset="-120"/>
-              </a:rPr>
-              <a:t>敬</a:t>
-            </a:r>
-            <a:r>
-              <a:rPr lang="zh-TW" altLang="en-US" sz="5400" b="1" dirty="0">
-                <a:latin typeface="Microsoft JhengHei" panose="020B0604030504040204" pitchFamily="34" charset="-120"/>
-                <a:ea typeface="Microsoft JhengHei" panose="020B0604030504040204" pitchFamily="34" charset="-120"/>
-              </a:rPr>
-              <a:t>拜化成一首歌 </a:t>
-            </a:r>
-            <a:endParaRPr lang="vi-VN" altLang="zh-TW" sz="5400" b="1" dirty="0">
-              <a:latin typeface="Microsoft JhengHei" panose="020B0604030504040204" pitchFamily="34" charset="-120"/>
-              <a:ea typeface="Microsoft JhengHei" panose="020B0604030504040204" pitchFamily="34" charset="-120"/>
-            </a:endParaRPr>
-          </a:p>
-          <a:p>
-            <a:pPr marL="0" indent="0" algn="ctr">
-              <a:buNone/>
-            </a:pPr>
-            <a:r>
-              <a:rPr lang="zh-TW" altLang="en-US" sz="5400" b="1" dirty="0">
-                <a:latin typeface="Microsoft JhengHei" panose="020B0604030504040204" pitchFamily="34" charset="-120"/>
-                <a:ea typeface="Microsoft JhengHei" panose="020B0604030504040204" pitchFamily="34" charset="-120"/>
-              </a:rPr>
-              <a:t>單</a:t>
-            </a:r>
-            <a:r>
-              <a:rPr lang="zh-TW" altLang="en-US" sz="5400" b="1" dirty="0">
-                <a:latin typeface="Microsoft JhengHei" panose="020B0604030504040204" pitchFamily="34" charset="-120"/>
-                <a:ea typeface="Microsoft JhengHei" panose="020B0604030504040204" pitchFamily="34" charset="-120"/>
-              </a:rPr>
-              <a:t>單要唱給祢聽</a:t>
-            </a:r>
-            <a:endParaRPr lang="vi-VN" sz="5400" b="1" dirty="0">
-              <a:latin typeface="Microsoft JhengHei" panose="020B0604030504040204" pitchFamily="34" charset="-120"/>
+              <a:t> )</a:t>
+            </a:r>
+            <a:endParaRPr lang="vi-VN" sz="3733" b="1" dirty="0">
+              <a:solidFill>
+                <a:srgbClr val="660033"/>
+              </a:solidFill>
               <a:ea typeface="Microsoft JhengHei" panose="020B0604030504040204" pitchFamily="34" charset="-120"/>
             </a:endParaRPr>
           </a:p>
@@ -3416,7 +3304,7 @@
     </p:spTree>
     <p:extLst>
       <p:ext uri="{BB962C8B-B14F-4D97-AF65-F5344CB8AC3E}">
-        <p14:creationId xmlns:p14="http://schemas.microsoft.com/office/powerpoint/2010/main" val="2378533052"/>
+        <p14:creationId xmlns:p14="http://schemas.microsoft.com/office/powerpoint/2010/main" val="2076757431"/>
       </p:ext>
     </p:extLst>
   </p:cSld>
@@ -3431,7 +3319,13 @@
   <p:cSld>
     <p:spTree>
       <p:nvGrpSpPr>
-        <p:cNvPr id="1" name=""/>
+        <p:cNvPr id="1" name="">
+          <a:extLst>
+            <a:ext uri="{FF2B5EF4-FFF2-40B4-BE49-F238E27FC236}">
+              <a16:creationId xmlns:a16="http://schemas.microsoft.com/office/drawing/2014/main" id="{6C24D910-2F49-7834-E3AB-B781E924104F}"/>
+            </a:ext>
+          </a:extLst>
+        </p:cNvPr>
         <p:cNvGrpSpPr/>
         <p:nvPr/>
       </p:nvGrpSpPr>
@@ -3445,265 +3339,126 @@
       </p:grpSpPr>
       <p:sp>
         <p:nvSpPr>
-          <p:cNvPr id="2" name="Title 1"/>
-          <p:cNvSpPr>
-            <a:spLocks noGrp="1"/>
-          </p:cNvSpPr>
-          <p:nvPr>
-            <p:ph type="title"/>
-          </p:nvPr>
-        </p:nvSpPr>
-        <p:spPr/>
-        <p:txBody>
-          <a:bodyPr>
+          <p:cNvPr id="5" name="內容版面配置區 4">
+            <a:extLst>
+              <a:ext uri="{FF2B5EF4-FFF2-40B4-BE49-F238E27FC236}">
+                <a16:creationId xmlns:a16="http://schemas.microsoft.com/office/drawing/2014/main" id="{ED0EB09B-6882-F52C-5F0F-619586BEEF9D}"/>
+              </a:ext>
+            </a:extLst>
+          </p:cNvPr>
+          <p:cNvSpPr>
+            <a:spLocks noGrp="1"/>
+          </p:cNvSpPr>
+          <p:nvPr>
+            <p:ph idx="1"/>
+          </p:nvPr>
+        </p:nvSpPr>
+        <p:spPr>
+          <a:xfrm>
+            <a:off x="0" y="2084851"/>
+            <a:ext cx="12192000" cy="2404863"/>
+          </a:xfrm>
+        </p:spPr>
+        <p:txBody>
+          <a:bodyPr anchor="ctr">
             <a:normAutofit/>
           </a:bodyPr>
           <a:lstStyle/>
           <a:p>
-            <a:r>
-              <a:rPr lang="zh-TW" altLang="en-US" sz="4800" b="1" dirty="0">
+            <a:pPr marL="0" indent="0" algn="ctr">
+              <a:buNone/>
+            </a:pPr>
+            <a:r>
+              <a:rPr lang="zh-TW" altLang="en-US" sz="6400" b="1" dirty="0">
+                <a:solidFill>
+                  <a:srgbClr val="660033"/>
+                </a:solidFill>
+                <a:latin typeface="微軟正黑體" pitchFamily="34" charset="-120"/>
+                <a:ea typeface="微軟正黑體" pitchFamily="34" charset="-120"/>
+              </a:rPr>
+              <a:t>心中思想祢的好 </a:t>
+            </a:r>
+          </a:p>
+          <a:p>
+            <a:pPr marL="0" indent="0" algn="ctr">
+              <a:buNone/>
+            </a:pPr>
+            <a:r>
+              <a:rPr lang="zh-TW" altLang="en-US" sz="6400" b="1" dirty="0">
+                <a:solidFill>
+                  <a:srgbClr val="660033"/>
+                </a:solidFill>
+                <a:latin typeface="微軟正黑體" pitchFamily="34" charset="-120"/>
+                <a:ea typeface="微軟正黑體" pitchFamily="34" charset="-120"/>
+              </a:rPr>
+              <a:t>更多與祢來親近</a:t>
+            </a:r>
+          </a:p>
+        </p:txBody>
+      </p:sp>
+      <p:sp>
+        <p:nvSpPr>
+          <p:cNvPr id="3" name="TextBox 2">
+            <a:extLst>
+              <a:ext uri="{FF2B5EF4-FFF2-40B4-BE49-F238E27FC236}">
+                <a16:creationId xmlns:a16="http://schemas.microsoft.com/office/drawing/2014/main" id="{CC0AC2AC-AC27-86FC-1C87-520F98651523}"/>
+              </a:ext>
+            </a:extLst>
+          </p:cNvPr>
+          <p:cNvSpPr txBox="1"/>
+          <p:nvPr/>
+        </p:nvSpPr>
+        <p:spPr>
+          <a:xfrm>
+            <a:off x="0" y="5157192"/>
+            <a:ext cx="12192000" cy="666786"/>
+          </a:xfrm>
+          <a:prstGeom prst="rect">
+            <a:avLst/>
+          </a:prstGeom>
+          <a:noFill/>
+        </p:spPr>
+        <p:txBody>
+          <a:bodyPr wrap="square" rtlCol="0">
+            <a:spAutoFit/>
+          </a:bodyPr>
+          <a:lstStyle/>
+          <a:p>
+            <a:pPr algn="ctr"/>
+            <a:r>
+              <a:rPr lang="en-US" sz="3733" b="1" dirty="0">
+                <a:solidFill>
+                  <a:srgbClr val="660033"/>
+                </a:solidFill>
                 <a:latin typeface="Microsoft JhengHei" panose="020B0604030504040204" pitchFamily="34" charset="-120"/>
                 <a:ea typeface="Microsoft JhengHei" panose="020B0604030504040204" pitchFamily="34" charset="-120"/>
               </a:rPr>
-              <a:t>從早晨到夜</a:t>
-            </a:r>
-            <a:r>
-              <a:rPr lang="zh-TW" altLang="en-US" sz="4800" b="1" dirty="0" smtClean="0">
+              <a:t>( </a:t>
+            </a:r>
+            <a:r>
+              <a:rPr lang="zh-CN" altLang="en-US" sz="3733" b="1" dirty="0">
+                <a:solidFill>
+                  <a:srgbClr val="660033"/>
+                </a:solidFill>
                 <a:latin typeface="Microsoft JhengHei" panose="020B0604030504040204" pitchFamily="34" charset="-120"/>
                 <a:ea typeface="Microsoft JhengHei" panose="020B0604030504040204" pitchFamily="34" charset="-120"/>
               </a:rPr>
-              <a:t>晚</a:t>
-            </a:r>
-            <a:endParaRPr lang="vi-VN" sz="4800" b="1" dirty="0">
-              <a:ea typeface="Microsoft JhengHei" panose="020B0604030504040204" pitchFamily="34" charset="-120"/>
-            </a:endParaRPr>
-          </a:p>
-        </p:txBody>
-      </p:sp>
-      <p:sp>
-        <p:nvSpPr>
-          <p:cNvPr id="3" name="Content Placeholder 2"/>
-          <p:cNvSpPr>
-            <a:spLocks noGrp="1"/>
-          </p:cNvSpPr>
-          <p:nvPr>
-            <p:ph idx="1"/>
-          </p:nvPr>
-        </p:nvSpPr>
-        <p:spPr/>
-        <p:txBody>
-          <a:bodyPr>
-            <a:normAutofit/>
-          </a:bodyPr>
-          <a:lstStyle/>
-          <a:p>
-            <a:pPr marL="0" indent="0" algn="ctr">
-              <a:buNone/>
-            </a:pPr>
-            <a:r>
-              <a:rPr lang="zh-TW" altLang="en-US" sz="5400" b="1" dirty="0">
+              <a:t>正歌</a:t>
+            </a:r>
+            <a:r>
+              <a:rPr lang="en-US" sz="3733" b="1" dirty="0">
+                <a:solidFill>
+                  <a:srgbClr val="660033"/>
+                </a:solidFill>
                 <a:latin typeface="Microsoft JhengHei" panose="020B0604030504040204" pitchFamily="34" charset="-120"/>
                 <a:ea typeface="Microsoft JhengHei" panose="020B0604030504040204" pitchFamily="34" charset="-120"/>
               </a:rPr>
-              <a:t>從早晨到夜</a:t>
-            </a:r>
-            <a:r>
-              <a:rPr lang="zh-TW" altLang="en-US" sz="5400" b="1" dirty="0">
-                <a:latin typeface="Microsoft JhengHei" panose="020B0604030504040204" pitchFamily="34" charset="-120"/>
-                <a:ea typeface="Microsoft JhengHei" panose="020B0604030504040204" pitchFamily="34" charset="-120"/>
-              </a:rPr>
-              <a:t>晚</a:t>
-            </a:r>
-            <a:r>
-              <a:rPr lang="vi-VN" altLang="zh-TW" sz="5400" b="1" dirty="0">
-                <a:latin typeface="Microsoft JhengHei" panose="020B0604030504040204" pitchFamily="34" charset="-120"/>
-                <a:ea typeface="Microsoft JhengHei" panose="020B0604030504040204" pitchFamily="34" charset="-120"/>
-              </a:rPr>
-              <a:t>  </a:t>
-            </a:r>
-            <a:r>
-              <a:rPr lang="zh-TW" altLang="en-US" sz="5400" b="1" dirty="0">
-                <a:latin typeface="Microsoft JhengHei" panose="020B0604030504040204" pitchFamily="34" charset="-120"/>
-                <a:ea typeface="Microsoft JhengHei" panose="020B0604030504040204" pitchFamily="34" charset="-120"/>
-              </a:rPr>
-              <a:t>從</a:t>
-            </a:r>
-            <a:r>
-              <a:rPr lang="zh-TW" altLang="en-US" sz="5400" b="1" dirty="0">
-                <a:latin typeface="Microsoft JhengHei" panose="020B0604030504040204" pitchFamily="34" charset="-120"/>
-                <a:ea typeface="Microsoft JhengHei" panose="020B0604030504040204" pitchFamily="34" charset="-120"/>
-              </a:rPr>
-              <a:t>曠野到高山 </a:t>
-            </a:r>
-            <a:endParaRPr lang="vi-VN" altLang="zh-TW" sz="5400" b="1" dirty="0">
-              <a:latin typeface="Microsoft JhengHei" panose="020B0604030504040204" pitchFamily="34" charset="-120"/>
-              <a:ea typeface="Microsoft JhengHei" panose="020B0604030504040204" pitchFamily="34" charset="-120"/>
-            </a:endParaRPr>
-          </a:p>
-          <a:p>
-            <a:pPr marL="0" indent="0" algn="ctr">
-              <a:buNone/>
-            </a:pPr>
-            <a:r>
-              <a:rPr lang="zh-TW" altLang="en-US" sz="5400" b="1" dirty="0">
-                <a:latin typeface="Microsoft JhengHei" panose="020B0604030504040204" pitchFamily="34" charset="-120"/>
-                <a:ea typeface="Microsoft JhengHei" panose="020B0604030504040204" pitchFamily="34" charset="-120"/>
-              </a:rPr>
-              <a:t>親</a:t>
-            </a:r>
-            <a:r>
-              <a:rPr lang="zh-TW" altLang="en-US" sz="5400" b="1" dirty="0">
-                <a:latin typeface="Microsoft JhengHei" panose="020B0604030504040204" pitchFamily="34" charset="-120"/>
-                <a:ea typeface="Microsoft JhengHei" panose="020B0604030504040204" pitchFamily="34" charset="-120"/>
-              </a:rPr>
-              <a:t>愛</a:t>
-            </a:r>
-            <a:r>
-              <a:rPr lang="zh-TW" altLang="en-US" sz="5400" b="1" dirty="0">
-                <a:latin typeface="Microsoft JhengHei" panose="020B0604030504040204" pitchFamily="34" charset="-120"/>
-                <a:ea typeface="Microsoft JhengHei" panose="020B0604030504040204" pitchFamily="34" charset="-120"/>
-              </a:rPr>
-              <a:t>主</a:t>
-            </a:r>
-            <a:r>
-              <a:rPr lang="vi-VN" altLang="zh-TW" sz="5400" b="1" dirty="0">
-                <a:latin typeface="Microsoft JhengHei" panose="020B0604030504040204" pitchFamily="34" charset="-120"/>
-                <a:ea typeface="Microsoft JhengHei" panose="020B0604030504040204" pitchFamily="34" charset="-120"/>
-              </a:rPr>
-              <a:t> </a:t>
-            </a:r>
-            <a:r>
-              <a:rPr lang="vi-VN" altLang="zh-TW" sz="5400" b="1" dirty="0">
-                <a:latin typeface="Microsoft JhengHei" panose="020B0604030504040204" pitchFamily="34" charset="-120"/>
-                <a:ea typeface="Microsoft JhengHei" panose="020B0604030504040204" pitchFamily="34" charset="-120"/>
-              </a:rPr>
-              <a:t> </a:t>
-            </a:r>
-            <a:r>
-              <a:rPr lang="zh-TW" altLang="en-US" sz="5400" b="1" dirty="0">
-                <a:latin typeface="Microsoft JhengHei" panose="020B0604030504040204" pitchFamily="34" charset="-120"/>
-                <a:ea typeface="Microsoft JhengHei" panose="020B0604030504040204" pitchFamily="34" charset="-120"/>
-              </a:rPr>
-              <a:t>我</a:t>
-            </a:r>
-            <a:r>
-              <a:rPr lang="zh-TW" altLang="en-US" sz="5400" b="1" dirty="0">
-                <a:latin typeface="Microsoft JhengHei" panose="020B0604030504040204" pitchFamily="34" charset="-120"/>
-                <a:ea typeface="Microsoft JhengHei" panose="020B0604030504040204" pitchFamily="34" charset="-120"/>
-              </a:rPr>
-              <a:t>要稱頌祢美名 </a:t>
-            </a:r>
-            <a:endParaRPr lang="vi-VN" altLang="zh-TW" sz="5400" b="1" dirty="0">
-              <a:latin typeface="Microsoft JhengHei" panose="020B0604030504040204" pitchFamily="34" charset="-120"/>
-              <a:ea typeface="Microsoft JhengHei" panose="020B0604030504040204" pitchFamily="34" charset="-120"/>
-            </a:endParaRPr>
-          </a:p>
-          <a:p>
-            <a:pPr marL="0" indent="0" algn="ctr">
-              <a:buNone/>
-            </a:pPr>
-            <a:r>
-              <a:rPr lang="zh-TW" altLang="en-US" sz="5400" b="1" dirty="0">
-                <a:latin typeface="Microsoft JhengHei" panose="020B0604030504040204" pitchFamily="34" charset="-120"/>
-                <a:ea typeface="Microsoft JhengHei" panose="020B0604030504040204" pitchFamily="34" charset="-120"/>
-              </a:rPr>
-              <a:t>從</a:t>
-            </a:r>
-            <a:r>
-              <a:rPr lang="zh-TW" altLang="en-US" sz="5400" b="1" dirty="0">
-                <a:latin typeface="Microsoft JhengHei" panose="020B0604030504040204" pitchFamily="34" charset="-120"/>
-                <a:ea typeface="Microsoft JhengHei" panose="020B0604030504040204" pitchFamily="34" charset="-120"/>
-              </a:rPr>
-              <a:t>早晨到夜</a:t>
-            </a:r>
-            <a:r>
-              <a:rPr lang="zh-TW" altLang="en-US" sz="5400" b="1" dirty="0">
-                <a:latin typeface="Microsoft JhengHei" panose="020B0604030504040204" pitchFamily="34" charset="-120"/>
-                <a:ea typeface="Microsoft JhengHei" panose="020B0604030504040204" pitchFamily="34" charset="-120"/>
-              </a:rPr>
-              <a:t>晚</a:t>
-            </a:r>
-            <a:r>
-              <a:rPr lang="vi-VN" altLang="zh-TW" sz="5400" b="1" dirty="0">
-                <a:latin typeface="Microsoft JhengHei" panose="020B0604030504040204" pitchFamily="34" charset="-120"/>
-                <a:ea typeface="Microsoft JhengHei" panose="020B0604030504040204" pitchFamily="34" charset="-120"/>
-              </a:rPr>
-              <a:t>  </a:t>
-            </a:r>
-            <a:r>
-              <a:rPr lang="zh-TW" altLang="en-US" sz="5400" b="1" dirty="0">
-                <a:latin typeface="Microsoft JhengHei" panose="020B0604030504040204" pitchFamily="34" charset="-120"/>
-                <a:ea typeface="Microsoft JhengHei" panose="020B0604030504040204" pitchFamily="34" charset="-120"/>
-              </a:rPr>
-              <a:t>祢</a:t>
-            </a:r>
-            <a:r>
-              <a:rPr lang="zh-TW" altLang="en-US" sz="5400" b="1" dirty="0">
-                <a:latin typeface="Microsoft JhengHei" panose="020B0604030504040204" pitchFamily="34" charset="-120"/>
-                <a:ea typeface="Microsoft JhengHei" panose="020B0604030504040204" pitchFamily="34" charset="-120"/>
-              </a:rPr>
-              <a:t>愛永不止息 </a:t>
-            </a:r>
-            <a:endParaRPr lang="vi-VN" altLang="zh-TW" sz="5400" b="1" dirty="0">
-              <a:latin typeface="Microsoft JhengHei" panose="020B0604030504040204" pitchFamily="34" charset="-120"/>
-              <a:ea typeface="Microsoft JhengHei" panose="020B0604030504040204" pitchFamily="34" charset="-120"/>
-            </a:endParaRPr>
-          </a:p>
-          <a:p>
-            <a:pPr marL="0" indent="0" algn="ctr">
-              <a:buNone/>
-            </a:pPr>
-            <a:r>
-              <a:rPr lang="zh-TW" altLang="en-US" sz="5400" b="1" dirty="0">
-                <a:latin typeface="Microsoft JhengHei" panose="020B0604030504040204" pitchFamily="34" charset="-120"/>
-                <a:ea typeface="Microsoft JhengHei" panose="020B0604030504040204" pitchFamily="34" charset="-120"/>
-              </a:rPr>
-              <a:t>親</a:t>
-            </a:r>
-            <a:r>
-              <a:rPr lang="zh-TW" altLang="en-US" sz="5400" b="1" dirty="0">
-                <a:latin typeface="Microsoft JhengHei" panose="020B0604030504040204" pitchFamily="34" charset="-120"/>
-                <a:ea typeface="Microsoft JhengHei" panose="020B0604030504040204" pitchFamily="34" charset="-120"/>
-              </a:rPr>
-              <a:t>愛</a:t>
-            </a:r>
-            <a:r>
-              <a:rPr lang="zh-TW" altLang="en-US" sz="5400" b="1" dirty="0">
-                <a:latin typeface="Microsoft JhengHei" panose="020B0604030504040204" pitchFamily="34" charset="-120"/>
-                <a:ea typeface="Microsoft JhengHei" panose="020B0604030504040204" pitchFamily="34" charset="-120"/>
-              </a:rPr>
-              <a:t>主</a:t>
-            </a:r>
-            <a:r>
-              <a:rPr lang="vi-VN" altLang="zh-TW" sz="5400" b="1" dirty="0">
-                <a:latin typeface="Microsoft JhengHei" panose="020B0604030504040204" pitchFamily="34" charset="-120"/>
-                <a:ea typeface="Microsoft JhengHei" panose="020B0604030504040204" pitchFamily="34" charset="-120"/>
-              </a:rPr>
-              <a:t> </a:t>
-            </a:r>
-            <a:r>
-              <a:rPr lang="vi-VN" altLang="zh-TW" sz="5400" b="1" dirty="0">
-                <a:latin typeface="Microsoft JhengHei" panose="020B0604030504040204" pitchFamily="34" charset="-120"/>
-                <a:ea typeface="Microsoft JhengHei" panose="020B0604030504040204" pitchFamily="34" charset="-120"/>
-              </a:rPr>
-              <a:t> </a:t>
-            </a:r>
-            <a:r>
-              <a:rPr lang="zh-TW" altLang="en-US" sz="5400" b="1" dirty="0">
-                <a:latin typeface="Microsoft JhengHei" panose="020B0604030504040204" pitchFamily="34" charset="-120"/>
-                <a:ea typeface="Microsoft JhengHei" panose="020B0604030504040204" pitchFamily="34" charset="-120"/>
-              </a:rPr>
-              <a:t>一</a:t>
-            </a:r>
-            <a:r>
-              <a:rPr lang="zh-TW" altLang="en-US" sz="5400" b="1" dirty="0">
-                <a:latin typeface="Microsoft JhengHei" panose="020B0604030504040204" pitchFamily="34" charset="-120"/>
-                <a:ea typeface="Microsoft JhengHei" panose="020B0604030504040204" pitchFamily="34" charset="-120"/>
-              </a:rPr>
-              <a:t>生緊緊跟隨祢</a:t>
-            </a:r>
-            <a:endParaRPr lang="vi-VN" sz="5400" b="1" dirty="0">
-              <a:latin typeface="Microsoft JhengHei" panose="020B0604030504040204" pitchFamily="34" charset="-120"/>
+              <a:t> )</a:t>
+            </a:r>
+            <a:endParaRPr lang="vi-VN" sz="3733" b="1" dirty="0">
+              <a:solidFill>
+                <a:srgbClr val="660033"/>
+              </a:solidFill>
               <a:ea typeface="Microsoft JhengHei" panose="020B0604030504040204" pitchFamily="34" charset="-120"/>
             </a:endParaRPr>
           </a:p>
@@ -3712,7 +3467,7 @@
     </p:spTree>
     <p:extLst>
       <p:ext uri="{BB962C8B-B14F-4D97-AF65-F5344CB8AC3E}">
-        <p14:creationId xmlns:p14="http://schemas.microsoft.com/office/powerpoint/2010/main" val="274878215"/>
+        <p14:creationId xmlns:p14="http://schemas.microsoft.com/office/powerpoint/2010/main" val="2207683100"/>
       </p:ext>
     </p:extLst>
   </p:cSld>
@@ -3727,7 +3482,13 @@
   <p:cSld>
     <p:spTree>
       <p:nvGrpSpPr>
-        <p:cNvPr id="1" name=""/>
+        <p:cNvPr id="1" name="">
+          <a:extLst>
+            <a:ext uri="{FF2B5EF4-FFF2-40B4-BE49-F238E27FC236}">
+              <a16:creationId xmlns:a16="http://schemas.microsoft.com/office/drawing/2014/main" id="{2359F6A1-DBF9-700C-2C8D-85726A1A3937}"/>
+            </a:ext>
+          </a:extLst>
+        </p:cNvPr>
         <p:cNvGrpSpPr/>
         <p:nvPr/>
       </p:nvGrpSpPr>
@@ -3741,195 +3502,788 @@
       </p:grpSpPr>
       <p:sp>
         <p:nvSpPr>
-          <p:cNvPr id="2" name="Title 1"/>
-          <p:cNvSpPr>
-            <a:spLocks noGrp="1"/>
-          </p:cNvSpPr>
-          <p:nvPr>
-            <p:ph type="title"/>
-          </p:nvPr>
-        </p:nvSpPr>
-        <p:spPr/>
-        <p:txBody>
-          <a:bodyPr>
+          <p:cNvPr id="5" name="內容版面配置區 4">
+            <a:extLst>
+              <a:ext uri="{FF2B5EF4-FFF2-40B4-BE49-F238E27FC236}">
+                <a16:creationId xmlns:a16="http://schemas.microsoft.com/office/drawing/2014/main" id="{87D4D0C9-5E9E-69B1-5855-238AC0B32D4C}"/>
+              </a:ext>
+            </a:extLst>
+          </p:cNvPr>
+          <p:cNvSpPr>
+            <a:spLocks noGrp="1"/>
+          </p:cNvSpPr>
+          <p:nvPr>
+            <p:ph idx="1"/>
+          </p:nvPr>
+        </p:nvSpPr>
+        <p:spPr>
+          <a:xfrm>
+            <a:off x="0" y="2084851"/>
+            <a:ext cx="12192000" cy="2404863"/>
+          </a:xfrm>
+        </p:spPr>
+        <p:txBody>
+          <a:bodyPr anchor="ctr">
             <a:normAutofit/>
           </a:bodyPr>
           <a:lstStyle/>
           <a:p>
-            <a:r>
-              <a:rPr lang="zh-TW" altLang="en-US" sz="4800" b="1" dirty="0">
+            <a:pPr marL="0" indent="0" algn="ctr">
+              <a:buNone/>
+            </a:pPr>
+            <a:r>
+              <a:rPr lang="zh-TW" altLang="en-US" sz="6400" b="1" dirty="0">
+                <a:solidFill>
+                  <a:srgbClr val="660033"/>
+                </a:solidFill>
+                <a:latin typeface="微軟正黑體" pitchFamily="34" charset="-120"/>
+                <a:ea typeface="微軟正黑體" pitchFamily="34" charset="-120"/>
+              </a:rPr>
+              <a:t>夜晚我仍要歌唱 </a:t>
+            </a:r>
+          </a:p>
+          <a:p>
+            <a:pPr marL="0" indent="0" algn="ctr">
+              <a:buNone/>
+            </a:pPr>
+            <a:r>
+              <a:rPr lang="zh-TW" altLang="en-US" sz="6400" b="1" dirty="0">
+                <a:solidFill>
+                  <a:srgbClr val="660033"/>
+                </a:solidFill>
+                <a:latin typeface="微軟正黑體" pitchFamily="34" charset="-120"/>
+                <a:ea typeface="微軟正黑體" pitchFamily="34" charset="-120"/>
+              </a:rPr>
+              <a:t>向祢闡明我心意</a:t>
+            </a:r>
+          </a:p>
+        </p:txBody>
+      </p:sp>
+      <p:sp>
+        <p:nvSpPr>
+          <p:cNvPr id="3" name="TextBox 2">
+            <a:extLst>
+              <a:ext uri="{FF2B5EF4-FFF2-40B4-BE49-F238E27FC236}">
+                <a16:creationId xmlns:a16="http://schemas.microsoft.com/office/drawing/2014/main" id="{6C1646A1-4DEA-BED3-940F-F6EF1707A4E7}"/>
+              </a:ext>
+            </a:extLst>
+          </p:cNvPr>
+          <p:cNvSpPr txBox="1"/>
+          <p:nvPr/>
+        </p:nvSpPr>
+        <p:spPr>
+          <a:xfrm>
+            <a:off x="0" y="5157192"/>
+            <a:ext cx="12192000" cy="666786"/>
+          </a:xfrm>
+          <a:prstGeom prst="rect">
+            <a:avLst/>
+          </a:prstGeom>
+          <a:noFill/>
+        </p:spPr>
+        <p:txBody>
+          <a:bodyPr wrap="square" rtlCol="0">
+            <a:spAutoFit/>
+          </a:bodyPr>
+          <a:lstStyle/>
+          <a:p>
+            <a:pPr algn="ctr"/>
+            <a:r>
+              <a:rPr lang="en-US" sz="3733" b="1" dirty="0">
+                <a:solidFill>
+                  <a:srgbClr val="660033"/>
+                </a:solidFill>
                 <a:latin typeface="Microsoft JhengHei" panose="020B0604030504040204" pitchFamily="34" charset="-120"/>
                 <a:ea typeface="Microsoft JhengHei" panose="020B0604030504040204" pitchFamily="34" charset="-120"/>
               </a:rPr>
-              <a:t>從早晨到夜</a:t>
-            </a:r>
-            <a:r>
-              <a:rPr lang="zh-TW" altLang="en-US" sz="4800" b="1" dirty="0" smtClean="0">
+              <a:t>( </a:t>
+            </a:r>
+            <a:r>
+              <a:rPr lang="zh-CN" altLang="en-US" sz="3733" b="1" dirty="0">
+                <a:solidFill>
+                  <a:srgbClr val="660033"/>
+                </a:solidFill>
                 <a:latin typeface="Microsoft JhengHei" panose="020B0604030504040204" pitchFamily="34" charset="-120"/>
                 <a:ea typeface="Microsoft JhengHei" panose="020B0604030504040204" pitchFamily="34" charset="-120"/>
               </a:rPr>
-              <a:t>晚</a:t>
-            </a:r>
-            <a:endParaRPr lang="vi-VN" sz="4800" b="1" dirty="0">
-              <a:ea typeface="Microsoft JhengHei" panose="020B0604030504040204" pitchFamily="34" charset="-120"/>
-            </a:endParaRPr>
-          </a:p>
-        </p:txBody>
-      </p:sp>
-      <p:sp>
-        <p:nvSpPr>
-          <p:cNvPr id="3" name="Content Placeholder 2"/>
-          <p:cNvSpPr>
-            <a:spLocks noGrp="1"/>
-          </p:cNvSpPr>
-          <p:nvPr>
-            <p:ph idx="1"/>
-          </p:nvPr>
-        </p:nvSpPr>
-        <p:spPr/>
-        <p:txBody>
-          <a:bodyPr>
-            <a:normAutofit/>
-          </a:bodyPr>
-          <a:lstStyle/>
-          <a:p>
-            <a:pPr marL="0" indent="0" algn="ctr">
-              <a:buNone/>
-            </a:pPr>
-            <a:r>
-              <a:rPr lang="zh-TW" altLang="en-US" sz="5400" b="1" dirty="0">
+              <a:t>正歌</a:t>
+            </a:r>
+            <a:r>
+              <a:rPr lang="en-US" sz="3733" b="1" dirty="0">
+                <a:solidFill>
+                  <a:srgbClr val="660033"/>
+                </a:solidFill>
                 <a:latin typeface="Microsoft JhengHei" panose="020B0604030504040204" pitchFamily="34" charset="-120"/>
                 <a:ea typeface="Microsoft JhengHei" panose="020B0604030504040204" pitchFamily="34" charset="-120"/>
               </a:rPr>
-              <a:t>我的</a:t>
-            </a:r>
-            <a:r>
-              <a:rPr lang="zh-TW" altLang="en-US" sz="5400" b="1" dirty="0">
+              <a:t> )</a:t>
+            </a:r>
+            <a:endParaRPr lang="vi-VN" sz="3733" b="1" dirty="0">
+              <a:solidFill>
+                <a:srgbClr val="660033"/>
+              </a:solidFill>
+              <a:ea typeface="Microsoft JhengHei" panose="020B0604030504040204" pitchFamily="34" charset="-120"/>
+            </a:endParaRPr>
+          </a:p>
+        </p:txBody>
+      </p:sp>
+    </p:spTree>
+    <p:extLst>
+      <p:ext uri="{BB962C8B-B14F-4D97-AF65-F5344CB8AC3E}">
+        <p14:creationId xmlns:p14="http://schemas.microsoft.com/office/powerpoint/2010/main" val="1000931919"/>
+      </p:ext>
+    </p:extLst>
+  </p:cSld>
+  <p:clrMapOvr>
+    <a:masterClrMapping/>
+  </p:clrMapOvr>
+</p:sld>
+</file>
+
+<file path=ppt/slides/slide5.xml><?xml version="1.0" encoding="utf-8"?>
+<p:sld xmlns:a="http://schemas.openxmlformats.org/drawingml/2006/main" xmlns:r="http://schemas.openxmlformats.org/officeDocument/2006/relationships" xmlns:p="http://schemas.openxmlformats.org/presentationml/2006/main">
+  <p:cSld>
+    <p:spTree>
+      <p:nvGrpSpPr>
+        <p:cNvPr id="1" name="">
+          <a:extLst>
+            <a:ext uri="{FF2B5EF4-FFF2-40B4-BE49-F238E27FC236}">
+              <a16:creationId xmlns:a16="http://schemas.microsoft.com/office/drawing/2014/main" id="{ECA68361-94D7-F9C5-703D-012693E630EF}"/>
+            </a:ext>
+          </a:extLst>
+        </p:cNvPr>
+        <p:cNvGrpSpPr/>
+        <p:nvPr/>
+      </p:nvGrpSpPr>
+      <p:grpSpPr>
+        <a:xfrm>
+          <a:off x="0" y="0"/>
+          <a:ext cx="0" cy="0"/>
+          <a:chOff x="0" y="0"/>
+          <a:chExt cx="0" cy="0"/>
+        </a:xfrm>
+      </p:grpSpPr>
+      <p:sp>
+        <p:nvSpPr>
+          <p:cNvPr id="5" name="內容版面配置區 4">
+            <a:extLst>
+              <a:ext uri="{FF2B5EF4-FFF2-40B4-BE49-F238E27FC236}">
+                <a16:creationId xmlns:a16="http://schemas.microsoft.com/office/drawing/2014/main" id="{E47DBA77-5806-DCD7-0483-A3F59E45F21D}"/>
+              </a:ext>
+            </a:extLst>
+          </p:cNvPr>
+          <p:cNvSpPr>
+            <a:spLocks noGrp="1"/>
+          </p:cNvSpPr>
+          <p:nvPr>
+            <p:ph idx="1"/>
+          </p:nvPr>
+        </p:nvSpPr>
+        <p:spPr>
+          <a:xfrm>
+            <a:off x="0" y="2084851"/>
+            <a:ext cx="12192000" cy="2404863"/>
+          </a:xfrm>
+        </p:spPr>
+        <p:txBody>
+          <a:bodyPr anchor="ctr">
+            <a:normAutofit/>
+          </a:bodyPr>
+          <a:lstStyle/>
+          <a:p>
+            <a:pPr marL="0" indent="0" algn="ctr">
+              <a:buNone/>
+            </a:pPr>
+            <a:r>
+              <a:rPr lang="zh-TW" altLang="en-US" sz="6400" b="1" dirty="0">
+                <a:solidFill>
+                  <a:srgbClr val="660033"/>
+                </a:solidFill>
+                <a:latin typeface="微軟正黑體" pitchFamily="34" charset="-120"/>
+                <a:ea typeface="微軟正黑體" pitchFamily="34" charset="-120"/>
+              </a:rPr>
+              <a:t>敬拜化成一首歌 </a:t>
+            </a:r>
+          </a:p>
+          <a:p>
+            <a:pPr marL="0" indent="0" algn="ctr">
+              <a:buNone/>
+            </a:pPr>
+            <a:r>
+              <a:rPr lang="zh-TW" altLang="en-US" sz="6400" b="1" dirty="0">
+                <a:solidFill>
+                  <a:srgbClr val="660033"/>
+                </a:solidFill>
+                <a:latin typeface="微軟正黑體" pitchFamily="34" charset="-120"/>
+                <a:ea typeface="微軟正黑體" pitchFamily="34" charset="-120"/>
+              </a:rPr>
+              <a:t>單單要唱給祢聽</a:t>
+            </a:r>
+          </a:p>
+        </p:txBody>
+      </p:sp>
+      <p:sp>
+        <p:nvSpPr>
+          <p:cNvPr id="3" name="TextBox 2">
+            <a:extLst>
+              <a:ext uri="{FF2B5EF4-FFF2-40B4-BE49-F238E27FC236}">
+                <a16:creationId xmlns:a16="http://schemas.microsoft.com/office/drawing/2014/main" id="{26B81152-B9D5-9DF2-5296-FC0466ADB80F}"/>
+              </a:ext>
+            </a:extLst>
+          </p:cNvPr>
+          <p:cNvSpPr txBox="1"/>
+          <p:nvPr/>
+        </p:nvSpPr>
+        <p:spPr>
+          <a:xfrm>
+            <a:off x="0" y="5157192"/>
+            <a:ext cx="12192000" cy="666786"/>
+          </a:xfrm>
+          <a:prstGeom prst="rect">
+            <a:avLst/>
+          </a:prstGeom>
+          <a:noFill/>
+        </p:spPr>
+        <p:txBody>
+          <a:bodyPr wrap="square" rtlCol="0">
+            <a:spAutoFit/>
+          </a:bodyPr>
+          <a:lstStyle/>
+          <a:p>
+            <a:pPr algn="ctr"/>
+            <a:r>
+              <a:rPr lang="en-US" sz="3733" b="1" dirty="0">
+                <a:solidFill>
+                  <a:srgbClr val="660033"/>
+                </a:solidFill>
                 <a:latin typeface="Microsoft JhengHei" panose="020B0604030504040204" pitchFamily="34" charset="-120"/>
                 <a:ea typeface="Microsoft JhengHei" panose="020B0604030504040204" pitchFamily="34" charset="-120"/>
               </a:rPr>
-              <a:t>主</a:t>
-            </a:r>
-            <a:r>
-              <a:rPr lang="vi-VN" altLang="zh-TW" sz="5400" b="1" dirty="0">
+              <a:t>( </a:t>
+            </a:r>
+            <a:r>
+              <a:rPr lang="zh-CN" altLang="en-US" sz="3733" b="1" dirty="0">
+                <a:solidFill>
+                  <a:srgbClr val="660033"/>
+                </a:solidFill>
                 <a:latin typeface="Microsoft JhengHei" panose="020B0604030504040204" pitchFamily="34" charset="-120"/>
                 <a:ea typeface="Microsoft JhengHei" panose="020B0604030504040204" pitchFamily="34" charset="-120"/>
               </a:rPr>
-              <a:t>  </a:t>
-            </a:r>
-            <a:r>
-              <a:rPr lang="zh-TW" altLang="en-US" sz="5400" b="1" dirty="0">
+              <a:t>正歌</a:t>
+            </a:r>
+            <a:r>
+              <a:rPr lang="en-US" sz="3733" b="1" dirty="0">
+                <a:solidFill>
+                  <a:srgbClr val="660033"/>
+                </a:solidFill>
                 <a:latin typeface="Microsoft JhengHei" panose="020B0604030504040204" pitchFamily="34" charset="-120"/>
                 <a:ea typeface="Microsoft JhengHei" panose="020B0604030504040204" pitchFamily="34" charset="-120"/>
               </a:rPr>
-              <a:t>我</a:t>
-            </a:r>
-            <a:r>
-              <a:rPr lang="zh-TW" altLang="en-US" sz="5400" b="1" dirty="0">
+              <a:t> )</a:t>
+            </a:r>
+            <a:endParaRPr lang="vi-VN" sz="3733" b="1" dirty="0">
+              <a:solidFill>
+                <a:srgbClr val="660033"/>
+              </a:solidFill>
+              <a:ea typeface="Microsoft JhengHei" panose="020B0604030504040204" pitchFamily="34" charset="-120"/>
+            </a:endParaRPr>
+          </a:p>
+        </p:txBody>
+      </p:sp>
+    </p:spTree>
+    <p:extLst>
+      <p:ext uri="{BB962C8B-B14F-4D97-AF65-F5344CB8AC3E}">
+        <p14:creationId xmlns:p14="http://schemas.microsoft.com/office/powerpoint/2010/main" val="738380761"/>
+      </p:ext>
+    </p:extLst>
+  </p:cSld>
+  <p:clrMapOvr>
+    <a:masterClrMapping/>
+  </p:clrMapOvr>
+</p:sld>
+</file>
+
+<file path=ppt/slides/slide6.xml><?xml version="1.0" encoding="utf-8"?>
+<p:sld xmlns:a="http://schemas.openxmlformats.org/drawingml/2006/main" xmlns:r="http://schemas.openxmlformats.org/officeDocument/2006/relationships" xmlns:p="http://schemas.openxmlformats.org/presentationml/2006/main">
+  <p:cSld>
+    <p:spTree>
+      <p:nvGrpSpPr>
+        <p:cNvPr id="1" name="">
+          <a:extLst>
+            <a:ext uri="{FF2B5EF4-FFF2-40B4-BE49-F238E27FC236}">
+              <a16:creationId xmlns:a16="http://schemas.microsoft.com/office/drawing/2014/main" id="{38ADF266-37E3-3C25-CA37-0CA77B65BED8}"/>
+            </a:ext>
+          </a:extLst>
+        </p:cNvPr>
+        <p:cNvGrpSpPr/>
+        <p:nvPr/>
+      </p:nvGrpSpPr>
+      <p:grpSpPr>
+        <a:xfrm>
+          <a:off x="0" y="0"/>
+          <a:ext cx="0" cy="0"/>
+          <a:chOff x="0" y="0"/>
+          <a:chExt cx="0" cy="0"/>
+        </a:xfrm>
+      </p:grpSpPr>
+      <p:sp>
+        <p:nvSpPr>
+          <p:cNvPr id="5" name="內容版面配置區 4">
+            <a:extLst>
+              <a:ext uri="{FF2B5EF4-FFF2-40B4-BE49-F238E27FC236}">
+                <a16:creationId xmlns:a16="http://schemas.microsoft.com/office/drawing/2014/main" id="{EADD19C9-57F6-D404-20CF-BACFDC2DC62F}"/>
+              </a:ext>
+            </a:extLst>
+          </p:cNvPr>
+          <p:cNvSpPr>
+            <a:spLocks noGrp="1"/>
+          </p:cNvSpPr>
+          <p:nvPr>
+            <p:ph idx="1"/>
+          </p:nvPr>
+        </p:nvSpPr>
+        <p:spPr>
+          <a:xfrm>
+            <a:off x="0" y="2084851"/>
+            <a:ext cx="12192000" cy="2404863"/>
+          </a:xfrm>
+        </p:spPr>
+        <p:txBody>
+          <a:bodyPr anchor="ctr">
+            <a:normAutofit/>
+          </a:bodyPr>
+          <a:lstStyle/>
+          <a:p>
+            <a:pPr marL="0" indent="0" algn="ctr">
+              <a:buNone/>
+            </a:pPr>
+            <a:r>
+              <a:rPr lang="zh-TW" altLang="en-US" sz="6400" b="1" dirty="0">
+                <a:solidFill>
+                  <a:srgbClr val="660033"/>
+                </a:solidFill>
+                <a:latin typeface="微軟正黑體" pitchFamily="34" charset="-120"/>
+                <a:ea typeface="微軟正黑體" pitchFamily="34" charset="-120"/>
+              </a:rPr>
+              <a:t>從早晨到夜晚  從曠野到高山 </a:t>
+            </a:r>
+          </a:p>
+          <a:p>
+            <a:pPr marL="0" indent="0" algn="ctr">
+              <a:buNone/>
+            </a:pPr>
+            <a:r>
+              <a:rPr lang="zh-TW" altLang="en-US" sz="6400" b="1" dirty="0">
+                <a:solidFill>
+                  <a:srgbClr val="660033"/>
+                </a:solidFill>
+                <a:latin typeface="微軟正黑體" pitchFamily="34" charset="-120"/>
+                <a:ea typeface="微軟正黑體" pitchFamily="34" charset="-120"/>
+              </a:rPr>
+              <a:t>親愛主  我要稱頌祢美名</a:t>
+            </a:r>
+          </a:p>
+        </p:txBody>
+      </p:sp>
+      <p:sp>
+        <p:nvSpPr>
+          <p:cNvPr id="3" name="TextBox 2">
+            <a:extLst>
+              <a:ext uri="{FF2B5EF4-FFF2-40B4-BE49-F238E27FC236}">
+                <a16:creationId xmlns:a16="http://schemas.microsoft.com/office/drawing/2014/main" id="{1A72B4D4-E014-0707-DF75-B1C7B1828451}"/>
+              </a:ext>
+            </a:extLst>
+          </p:cNvPr>
+          <p:cNvSpPr txBox="1"/>
+          <p:nvPr/>
+        </p:nvSpPr>
+        <p:spPr>
+          <a:xfrm>
+            <a:off x="0" y="5157192"/>
+            <a:ext cx="12192000" cy="666786"/>
+          </a:xfrm>
+          <a:prstGeom prst="rect">
+            <a:avLst/>
+          </a:prstGeom>
+          <a:noFill/>
+        </p:spPr>
+        <p:txBody>
+          <a:bodyPr wrap="square" rtlCol="0">
+            <a:spAutoFit/>
+          </a:bodyPr>
+          <a:lstStyle/>
+          <a:p>
+            <a:pPr algn="ctr"/>
+            <a:r>
+              <a:rPr lang="en-US" sz="3733" b="1" dirty="0">
+                <a:solidFill>
+                  <a:srgbClr val="660033"/>
+                </a:solidFill>
                 <a:latin typeface="Microsoft JhengHei" panose="020B0604030504040204" pitchFamily="34" charset="-120"/>
                 <a:ea typeface="Microsoft JhengHei" panose="020B0604030504040204" pitchFamily="34" charset="-120"/>
               </a:rPr>
-              <a:t>愛祢 </a:t>
-            </a:r>
-            <a:endParaRPr lang="vi-VN" altLang="zh-TW" sz="5400" b="1" dirty="0">
-              <a:latin typeface="Microsoft JhengHei" panose="020B0604030504040204" pitchFamily="34" charset="-120"/>
-              <a:ea typeface="Microsoft JhengHei" panose="020B0604030504040204" pitchFamily="34" charset="-120"/>
-            </a:endParaRPr>
-          </a:p>
-          <a:p>
-            <a:pPr marL="0" indent="0" algn="ctr">
-              <a:buNone/>
-            </a:pPr>
-            <a:r>
-              <a:rPr lang="zh-TW" altLang="en-US" sz="5400" b="1" dirty="0">
+              <a:t>( </a:t>
+            </a:r>
+            <a:r>
+              <a:rPr lang="zh-CN" altLang="en-US" sz="3733" b="1" dirty="0">
+                <a:solidFill>
+                  <a:srgbClr val="660033"/>
+                </a:solidFill>
                 <a:latin typeface="Microsoft JhengHei" panose="020B0604030504040204" pitchFamily="34" charset="-120"/>
                 <a:ea typeface="Microsoft JhengHei" panose="020B0604030504040204" pitchFamily="34" charset="-120"/>
               </a:rPr>
-              <a:t>我</a:t>
-            </a:r>
-            <a:r>
-              <a:rPr lang="zh-TW" altLang="en-US" sz="5400" b="1" dirty="0">
+              <a:t>副歌</a:t>
+            </a:r>
+            <a:r>
+              <a:rPr lang="en-US" sz="3733" b="1" dirty="0">
+                <a:solidFill>
+                  <a:srgbClr val="660033"/>
+                </a:solidFill>
                 <a:latin typeface="Microsoft JhengHei" panose="020B0604030504040204" pitchFamily="34" charset="-120"/>
                 <a:ea typeface="Microsoft JhengHei" panose="020B0604030504040204" pitchFamily="34" charset="-120"/>
               </a:rPr>
-              <a:t>要誇祢的愛無止盡 </a:t>
-            </a:r>
-            <a:endParaRPr lang="vi-VN" altLang="zh-TW" sz="5400" b="1" dirty="0">
-              <a:latin typeface="Microsoft JhengHei" panose="020B0604030504040204" pitchFamily="34" charset="-120"/>
+              <a:t> )</a:t>
+            </a:r>
+            <a:endParaRPr lang="vi-VN" sz="3733" b="1" dirty="0">
+              <a:solidFill>
+                <a:srgbClr val="660033"/>
+              </a:solidFill>
               <a:ea typeface="Microsoft JhengHei" panose="020B0604030504040204" pitchFamily="34" charset="-120"/>
             </a:endParaRPr>
           </a:p>
+        </p:txBody>
+      </p:sp>
+    </p:spTree>
+    <p:extLst>
+      <p:ext uri="{BB962C8B-B14F-4D97-AF65-F5344CB8AC3E}">
+        <p14:creationId xmlns:p14="http://schemas.microsoft.com/office/powerpoint/2010/main" val="939950190"/>
+      </p:ext>
+    </p:extLst>
+  </p:cSld>
+  <p:clrMapOvr>
+    <a:masterClrMapping/>
+  </p:clrMapOvr>
+</p:sld>
+</file>
+
+<file path=ppt/slides/slide7.xml><?xml version="1.0" encoding="utf-8"?>
+<p:sld xmlns:a="http://schemas.openxmlformats.org/drawingml/2006/main" xmlns:r="http://schemas.openxmlformats.org/officeDocument/2006/relationships" xmlns:p="http://schemas.openxmlformats.org/presentationml/2006/main">
+  <p:cSld>
+    <p:spTree>
+      <p:nvGrpSpPr>
+        <p:cNvPr id="1" name="">
+          <a:extLst>
+            <a:ext uri="{FF2B5EF4-FFF2-40B4-BE49-F238E27FC236}">
+              <a16:creationId xmlns:a16="http://schemas.microsoft.com/office/drawing/2014/main" id="{7772116C-47B9-4735-DA54-146B3F26421E}"/>
+            </a:ext>
+          </a:extLst>
+        </p:cNvPr>
+        <p:cNvGrpSpPr/>
+        <p:nvPr/>
+      </p:nvGrpSpPr>
+      <p:grpSpPr>
+        <a:xfrm>
+          <a:off x="0" y="0"/>
+          <a:ext cx="0" cy="0"/>
+          <a:chOff x="0" y="0"/>
+          <a:chExt cx="0" cy="0"/>
+        </a:xfrm>
+      </p:grpSpPr>
+      <p:sp>
+        <p:nvSpPr>
+          <p:cNvPr id="5" name="內容版面配置區 4">
+            <a:extLst>
+              <a:ext uri="{FF2B5EF4-FFF2-40B4-BE49-F238E27FC236}">
+                <a16:creationId xmlns:a16="http://schemas.microsoft.com/office/drawing/2014/main" id="{65298D09-6E90-4524-81D1-0C0C313A1BEE}"/>
+              </a:ext>
+            </a:extLst>
+          </p:cNvPr>
+          <p:cNvSpPr>
+            <a:spLocks noGrp="1"/>
+          </p:cNvSpPr>
+          <p:nvPr>
+            <p:ph idx="1"/>
+          </p:nvPr>
+        </p:nvSpPr>
+        <p:spPr>
+          <a:xfrm>
+            <a:off x="0" y="2084851"/>
+            <a:ext cx="12192000" cy="2404863"/>
+          </a:xfrm>
+        </p:spPr>
+        <p:txBody>
+          <a:bodyPr anchor="ctr">
+            <a:normAutofit/>
+          </a:bodyPr>
+          <a:lstStyle/>
           <a:p>
             <a:pPr marL="0" indent="0" algn="ctr">
               <a:buNone/>
             </a:pPr>
             <a:r>
-              <a:rPr lang="zh-TW" altLang="en-US" sz="5400" b="1" dirty="0">
+              <a:rPr lang="zh-TW" altLang="en-US" sz="6400" b="1" dirty="0">
+                <a:solidFill>
+                  <a:srgbClr val="660033"/>
+                </a:solidFill>
+                <a:latin typeface="微軟正黑體" pitchFamily="34" charset="-120"/>
+                <a:ea typeface="微軟正黑體" pitchFamily="34" charset="-120"/>
+              </a:rPr>
+              <a:t>從早晨到夜晚  祢愛永不止息 </a:t>
+            </a:r>
+          </a:p>
+          <a:p>
+            <a:pPr marL="0" indent="0" algn="ctr">
+              <a:buNone/>
+            </a:pPr>
+            <a:r>
+              <a:rPr lang="zh-TW" altLang="en-US" sz="6400" b="1" dirty="0">
+                <a:solidFill>
+                  <a:srgbClr val="660033"/>
+                </a:solidFill>
+                <a:latin typeface="微軟正黑體" pitchFamily="34" charset="-120"/>
+                <a:ea typeface="微軟正黑體" pitchFamily="34" charset="-120"/>
+              </a:rPr>
+              <a:t>親愛主  一生緊緊跟隨祢</a:t>
+            </a:r>
+          </a:p>
+        </p:txBody>
+      </p:sp>
+      <p:sp>
+        <p:nvSpPr>
+          <p:cNvPr id="3" name="TextBox 2">
+            <a:extLst>
+              <a:ext uri="{FF2B5EF4-FFF2-40B4-BE49-F238E27FC236}">
+                <a16:creationId xmlns:a16="http://schemas.microsoft.com/office/drawing/2014/main" id="{E0908DA6-E380-25D4-BB5D-7D1DFDA47926}"/>
+              </a:ext>
+            </a:extLst>
+          </p:cNvPr>
+          <p:cNvSpPr txBox="1"/>
+          <p:nvPr/>
+        </p:nvSpPr>
+        <p:spPr>
+          <a:xfrm>
+            <a:off x="0" y="5157192"/>
+            <a:ext cx="12192000" cy="666786"/>
+          </a:xfrm>
+          <a:prstGeom prst="rect">
+            <a:avLst/>
+          </a:prstGeom>
+          <a:noFill/>
+        </p:spPr>
+        <p:txBody>
+          <a:bodyPr wrap="square" rtlCol="0">
+            <a:spAutoFit/>
+          </a:bodyPr>
+          <a:lstStyle/>
+          <a:p>
+            <a:pPr algn="ctr"/>
+            <a:r>
+              <a:rPr lang="en-US" sz="3733" b="1" dirty="0">
+                <a:solidFill>
+                  <a:srgbClr val="660033"/>
+                </a:solidFill>
                 <a:latin typeface="Microsoft JhengHei" panose="020B0604030504040204" pitchFamily="34" charset="-120"/>
                 <a:ea typeface="Microsoft JhengHei" panose="020B0604030504040204" pitchFamily="34" charset="-120"/>
               </a:rPr>
-              <a:t>我</a:t>
-            </a:r>
-            <a:r>
-              <a:rPr lang="zh-TW" altLang="en-US" sz="5400" b="1" dirty="0">
+              <a:t>( </a:t>
+            </a:r>
+            <a:r>
+              <a:rPr lang="zh-CN" altLang="en-US" sz="3733" b="1" dirty="0">
+                <a:solidFill>
+                  <a:srgbClr val="660033"/>
+                </a:solidFill>
                 <a:latin typeface="Microsoft JhengHei" panose="020B0604030504040204" pitchFamily="34" charset="-120"/>
                 <a:ea typeface="Microsoft JhengHei" panose="020B0604030504040204" pitchFamily="34" charset="-120"/>
               </a:rPr>
-              <a:t>的</a:t>
-            </a:r>
-            <a:r>
-              <a:rPr lang="zh-TW" altLang="en-US" sz="5400" b="1" dirty="0">
+              <a:t>副歌</a:t>
+            </a:r>
+            <a:r>
+              <a:rPr lang="en-US" sz="3733" b="1" dirty="0">
+                <a:solidFill>
+                  <a:srgbClr val="660033"/>
+                </a:solidFill>
                 <a:latin typeface="Microsoft JhengHei" panose="020B0604030504040204" pitchFamily="34" charset="-120"/>
                 <a:ea typeface="Microsoft JhengHei" panose="020B0604030504040204" pitchFamily="34" charset="-120"/>
               </a:rPr>
-              <a:t>主</a:t>
-            </a:r>
-            <a:r>
-              <a:rPr lang="vi-VN" altLang="zh-TW" sz="5400" b="1" dirty="0">
+              <a:t> )</a:t>
+            </a:r>
+            <a:endParaRPr lang="vi-VN" sz="3733" b="1" dirty="0">
+              <a:solidFill>
+                <a:srgbClr val="660033"/>
+              </a:solidFill>
+              <a:ea typeface="Microsoft JhengHei" panose="020B0604030504040204" pitchFamily="34" charset="-120"/>
+            </a:endParaRPr>
+          </a:p>
+        </p:txBody>
+      </p:sp>
+    </p:spTree>
+    <p:extLst>
+      <p:ext uri="{BB962C8B-B14F-4D97-AF65-F5344CB8AC3E}">
+        <p14:creationId xmlns:p14="http://schemas.microsoft.com/office/powerpoint/2010/main" val="4169533097"/>
+      </p:ext>
+    </p:extLst>
+  </p:cSld>
+  <p:clrMapOvr>
+    <a:masterClrMapping/>
+  </p:clrMapOvr>
+</p:sld>
+</file>
+
+<file path=ppt/slides/slide8.xml><?xml version="1.0" encoding="utf-8"?>
+<p:sld xmlns:a="http://schemas.openxmlformats.org/drawingml/2006/main" xmlns:r="http://schemas.openxmlformats.org/officeDocument/2006/relationships" xmlns:p="http://schemas.openxmlformats.org/presentationml/2006/main">
+  <p:cSld>
+    <p:spTree>
+      <p:nvGrpSpPr>
+        <p:cNvPr id="1" name="">
+          <a:extLst>
+            <a:ext uri="{FF2B5EF4-FFF2-40B4-BE49-F238E27FC236}">
+              <a16:creationId xmlns:a16="http://schemas.microsoft.com/office/drawing/2014/main" id="{CCF65723-493D-CE45-F24E-BA9F4865E6D4}"/>
+            </a:ext>
+          </a:extLst>
+        </p:cNvPr>
+        <p:cNvGrpSpPr/>
+        <p:nvPr/>
+      </p:nvGrpSpPr>
+      <p:grpSpPr>
+        <a:xfrm>
+          <a:off x="0" y="0"/>
+          <a:ext cx="0" cy="0"/>
+          <a:chOff x="0" y="0"/>
+          <a:chExt cx="0" cy="0"/>
+        </a:xfrm>
+      </p:grpSpPr>
+      <p:sp>
+        <p:nvSpPr>
+          <p:cNvPr id="5" name="內容版面配置區 4">
+            <a:extLst>
+              <a:ext uri="{FF2B5EF4-FFF2-40B4-BE49-F238E27FC236}">
+                <a16:creationId xmlns:a16="http://schemas.microsoft.com/office/drawing/2014/main" id="{B18685EA-F3B9-CA35-6991-FBF2D55D5C54}"/>
+              </a:ext>
+            </a:extLst>
+          </p:cNvPr>
+          <p:cNvSpPr>
+            <a:spLocks noGrp="1"/>
+          </p:cNvSpPr>
+          <p:nvPr>
+            <p:ph idx="1"/>
+          </p:nvPr>
+        </p:nvSpPr>
+        <p:spPr>
+          <a:xfrm>
+            <a:off x="0" y="2084851"/>
+            <a:ext cx="12192000" cy="2404863"/>
+          </a:xfrm>
+        </p:spPr>
+        <p:txBody>
+          <a:bodyPr anchor="ctr">
+            <a:normAutofit/>
+          </a:bodyPr>
+          <a:lstStyle/>
+          <a:p>
+            <a:pPr marL="0" indent="0" algn="ctr">
+              <a:buNone/>
+            </a:pPr>
+            <a:r>
+              <a:rPr lang="zh-TW" altLang="en-US" sz="6400" b="1" dirty="0">
+                <a:solidFill>
+                  <a:srgbClr val="660033"/>
+                </a:solidFill>
+                <a:latin typeface="微軟正黑體" pitchFamily="34" charset="-120"/>
+                <a:ea typeface="微軟正黑體" pitchFamily="34" charset="-120"/>
+              </a:rPr>
+              <a:t>我的主  我愛祢 </a:t>
+            </a:r>
+          </a:p>
+          <a:p>
+            <a:pPr marL="0" indent="0" algn="ctr">
+              <a:buNone/>
+            </a:pPr>
+            <a:r>
+              <a:rPr lang="zh-TW" altLang="en-US" sz="6400" b="1" dirty="0">
+                <a:solidFill>
+                  <a:srgbClr val="660033"/>
+                </a:solidFill>
+                <a:latin typeface="微軟正黑體" pitchFamily="34" charset="-120"/>
+                <a:ea typeface="微軟正黑體" pitchFamily="34" charset="-120"/>
+              </a:rPr>
+              <a:t>我要誇祢的愛無止盡</a:t>
+            </a:r>
+          </a:p>
+        </p:txBody>
+      </p:sp>
+      <p:sp>
+        <p:nvSpPr>
+          <p:cNvPr id="3" name="TextBox 2">
+            <a:extLst>
+              <a:ext uri="{FF2B5EF4-FFF2-40B4-BE49-F238E27FC236}">
+                <a16:creationId xmlns:a16="http://schemas.microsoft.com/office/drawing/2014/main" id="{31226533-375C-C45F-2BD5-B5B1E88C9AC1}"/>
+              </a:ext>
+            </a:extLst>
+          </p:cNvPr>
+          <p:cNvSpPr txBox="1"/>
+          <p:nvPr/>
+        </p:nvSpPr>
+        <p:spPr>
+          <a:xfrm>
+            <a:off x="0" y="5157192"/>
+            <a:ext cx="12192000" cy="666786"/>
+          </a:xfrm>
+          <a:prstGeom prst="rect">
+            <a:avLst/>
+          </a:prstGeom>
+          <a:noFill/>
+        </p:spPr>
+        <p:txBody>
+          <a:bodyPr wrap="square" rtlCol="0">
+            <a:spAutoFit/>
+          </a:bodyPr>
+          <a:lstStyle/>
+          <a:p>
+            <a:pPr algn="ctr"/>
+            <a:r>
+              <a:rPr lang="en-US" sz="3733" b="1" dirty="0">
+                <a:solidFill>
+                  <a:srgbClr val="660033"/>
+                </a:solidFill>
                 <a:latin typeface="Microsoft JhengHei" panose="020B0604030504040204" pitchFamily="34" charset="-120"/>
                 <a:ea typeface="Microsoft JhengHei" panose="020B0604030504040204" pitchFamily="34" charset="-120"/>
               </a:rPr>
-              <a:t>  </a:t>
-            </a:r>
-            <a:r>
-              <a:rPr lang="zh-TW" altLang="en-US" sz="5400" b="1" dirty="0">
+              <a:t>( </a:t>
+            </a:r>
+            <a:r>
+              <a:rPr lang="zh-CN" altLang="en-US" sz="3733" b="1" dirty="0">
+                <a:solidFill>
+                  <a:srgbClr val="660033"/>
+                </a:solidFill>
                 <a:latin typeface="Microsoft JhengHei" panose="020B0604030504040204" pitchFamily="34" charset="-120"/>
                 <a:ea typeface="Microsoft JhengHei" panose="020B0604030504040204" pitchFamily="34" charset="-120"/>
               </a:rPr>
-              <a:t>我</a:t>
-            </a:r>
-            <a:r>
-              <a:rPr lang="zh-TW" altLang="en-US" sz="5400" b="1" dirty="0">
+              <a:t>橋</a:t>
+            </a:r>
+            <a:r>
+              <a:rPr lang="en-US" sz="3733" b="1" dirty="0">
+                <a:solidFill>
+                  <a:srgbClr val="660033"/>
+                </a:solidFill>
                 <a:latin typeface="Microsoft JhengHei" panose="020B0604030504040204" pitchFamily="34" charset="-120"/>
                 <a:ea typeface="Microsoft JhengHei" panose="020B0604030504040204" pitchFamily="34" charset="-120"/>
               </a:rPr>
-              <a:t>愛祢 </a:t>
-            </a:r>
-            <a:endParaRPr lang="vi-VN" altLang="zh-TW" sz="5400" b="1" dirty="0">
-              <a:latin typeface="Microsoft JhengHei" panose="020B0604030504040204" pitchFamily="34" charset="-120"/>
-              <a:ea typeface="Microsoft JhengHei" panose="020B0604030504040204" pitchFamily="34" charset="-120"/>
-            </a:endParaRPr>
-          </a:p>
-          <a:p>
-            <a:pPr marL="0" indent="0" algn="ctr">
-              <a:buNone/>
-            </a:pPr>
-            <a:r>
-              <a:rPr lang="zh-TW" altLang="en-US" sz="5400" b="1" dirty="0">
+              <a:t> )</a:t>
+            </a:r>
+            <a:r>
+              <a:rPr lang="zh-CN" altLang="en-US" sz="3733" b="1" dirty="0">
+                <a:solidFill>
+                  <a:srgbClr val="660033"/>
+                </a:solidFill>
                 <a:latin typeface="Microsoft JhengHei" panose="020B0604030504040204" pitchFamily="34" charset="-120"/>
                 <a:ea typeface="Microsoft JhengHei" panose="020B0604030504040204" pitchFamily="34" charset="-120"/>
               </a:rPr>
-              <a:t>我</a:t>
-            </a:r>
-            <a:r>
-              <a:rPr lang="zh-TW" altLang="en-US" sz="5400" b="1" dirty="0">
-                <a:latin typeface="Microsoft JhengHei" panose="020B0604030504040204" pitchFamily="34" charset="-120"/>
-                <a:ea typeface="Microsoft JhengHei" panose="020B0604030504040204" pitchFamily="34" charset="-120"/>
-              </a:rPr>
-              <a:t>要誇祢的愛無止盡</a:t>
-            </a:r>
-            <a:endParaRPr lang="vi-VN" sz="5400" b="1" dirty="0">
-              <a:latin typeface="Microsoft JhengHei" panose="020B0604030504040204" pitchFamily="34" charset="-120"/>
+              <a:t>（２次）</a:t>
+            </a:r>
+            <a:endParaRPr lang="vi-VN" sz="3733" b="1" dirty="0">
+              <a:solidFill>
+                <a:srgbClr val="660033"/>
+              </a:solidFill>
               <a:ea typeface="Microsoft JhengHei" panose="020B0604030504040204" pitchFamily="34" charset="-120"/>
             </a:endParaRPr>
           </a:p>
@@ -3938,7 +4292,7 @@
     </p:spTree>
     <p:extLst>
       <p:ext uri="{BB962C8B-B14F-4D97-AF65-F5344CB8AC3E}">
-        <p14:creationId xmlns:p14="http://schemas.microsoft.com/office/powerpoint/2010/main" val="2895372789"/>
+        <p14:creationId xmlns:p14="http://schemas.microsoft.com/office/powerpoint/2010/main" val="114846896"/>
       </p:ext>
     </p:extLst>
   </p:cSld>
